--- a/docs/avar-guide/AVAR-presentation.pptx
+++ b/docs/avar-guide/AVAR-presentation.pptx
@@ -40,9 +40,10 @@
     <p:sldId id="288" r:id="rId34"/>
     <p:sldId id="289" r:id="rId35"/>
     <p:sldId id="290" r:id="rId36"/>
+    <p:sldId id="291" r:id="rId37"/>
   </p:sldIdLst>
   <p:notesMasterIdLst>
-    <p:notesMasterId r:id="rId37"/>
+    <p:notesMasterId r:id="rId38"/>
   </p:notesMasterIdLst>
   <p:sldSz cx="12192000" cy="6858000"/>
   <p:notesSz cx="6858000" cy="12192000"/>
@@ -624,7 +625,7 @@
           <a:p>
             <a:r>
               <a:rPr lang="en-US" dirty="0"/>
-              <a:t>מסך העיבוד — יומן פעילות חי בשלוש שפות</a:t>
+              <a:t>מסך העיבוד — שחזור יומן הפעילות של הרצה אמיתית</a:t>
             </a:r>
             <a:endParaRPr lang="en-US" dirty="0"/>
           </a:p>
@@ -800,7 +801,7 @@
           <a:p>
             <a:r>
               <a:rPr lang="en-US" dirty="0"/>
-              <a:t>לשונית הטענות — ביטחון וסיכון כשני צירים נפרדים</a:t>
+              <a:t>תשע טענות אמיתיות — ביטחון וסיכון כשני צירים נפרדים</a:t>
             </a:r>
             <a:endParaRPr lang="en-US" dirty="0"/>
           </a:p>
@@ -1328,7 +1329,7 @@
           <a:p>
             <a:r>
               <a:rPr lang="en-US" dirty="0"/>
-              <a:t>ישויות מחולצות ומדורגות לפי רלוונטיות</a:t>
+              <a:t>ישויות ואירועים — ציר הזמן שחולץ מהמסמך</a:t>
             </a:r>
             <a:endParaRPr lang="en-US" dirty="0"/>
           </a:p>
@@ -2032,7 +2033,7 @@
           <a:p>
             <a:r>
               <a:rPr lang="en-US" dirty="0"/>
-              <a:t>שלב 1 באשף יצירת המיומנות</a:t>
+              <a:t>שלב 1 באשף — הזנה לדוגמה של מיומנות חדשה</a:t>
             </a:r>
             <a:endParaRPr lang="en-US" dirty="0"/>
           </a:p>
@@ -2560,7 +2561,7 @@
           <a:p>
             <a:r>
               <a:rPr lang="en-US" dirty="0"/>
-              <a:t>ניהול Workflows — תצורות ניתוח לשימוש חוזר</a:t>
+              <a:t>המבחן האמיתי של ארכיטקטורת המיומנויות והסוכנים אינו במה שהיא מגיעה איתו, אלא במה שנוסף לה אחר כך. שלוש ההרצות שבמדריך מדגימות בדיוק את זה: הן הופעלו ברובן על סוכנים ומיומנויות שלא היו במערכת ביום שהותקנה.</a:t>
             </a:r>
             <a:endParaRPr lang="en-US" dirty="0"/>
           </a:p>
@@ -2648,7 +2649,7 @@
           <a:p>
             <a:r>
               <a:rPr lang="en-US" dirty="0"/>
-              <a:t>ניהול מקורות — חיבור מאגרי מידע פרטיים</a:t>
+              <a:t>ניהול Workflows — תצורות ניתוח לשימוש חוזר</a:t>
             </a:r>
             <a:endParaRPr lang="en-US" dirty="0"/>
           </a:p>
@@ -2736,7 +2737,7 @@
           <a:p>
             <a:r>
               <a:rPr lang="en-US" dirty="0"/>
-              <a:t>ניהול משתמשים — למנהל מערכת בלבד</a:t>
+              <a:t>ניהול מקורות — חיבור מאגרי מידע פרטיים</a:t>
             </a:r>
             <a:endParaRPr lang="en-US" dirty="0"/>
           </a:p>
@@ -2824,7 +2825,7 @@
           <a:p>
             <a:r>
               <a:rPr lang="en-US" dirty="0"/>
-              <a:t>ארכיטקטורת האבטחה של AVAR נגזרת מהנחת יסוד אחת: המסמכים שהמערכת מקבלת הם הנכס הרגיש ביותר בה. מכאן נגזרות ההגבלות — אין מפתחות בצד לקוח, אין תוכן גולמי בלוגים, ואין אחסון לא מוצפן.</a:t>
+              <a:t>ניהול משתמשים — למנהל מערכת בלבד</a:t>
             </a:r>
             <a:endParaRPr lang="en-US" dirty="0"/>
           </a:p>
@@ -2912,7 +2913,7 @@
           <a:p>
             <a:r>
               <a:rPr lang="en-US" dirty="0"/>
-              <a:t>AVAR אינה מחליפה את האנליסט. היא מוודאת שאף הערכה לא תצא מהדלת בלי שמישהו — או משהו — ניסה להפריך אותה קודם.</a:t>
+              <a:t>ארכיטקטורת האבטחה של AVAR נגזרת מהנחת יסוד אחת: המסמכים שהמערכת מקבלת הם הנכס הרגיש ביותר בה. מכאן נגזרות ההגבלות — אין מפתחות בצד לקוח, אין תוכן גולמי בלוגים, ואין אחסון לא מוצפן.</a:t>
             </a:r>
             <a:endParaRPr lang="en-US" dirty="0"/>
           </a:p>
@@ -3000,7 +3001,7 @@
           <a:p>
             <a:r>
               <a:rPr lang="en-US" dirty="0"/>
-              <a:t/>
+              <a:t>AVAR אינה מחליפה את האנליסט. היא מוודאת שאף הערכה לא תצא מהדלת בלי שמישהו — או משהו — ניסה להפריך אותה קודם.</a:t>
             </a:r>
             <a:endParaRPr lang="en-US" dirty="0"/>
           </a:p>
@@ -3024,6 +3025,94 @@
             <a:fld id="{F7021451-1387-4CA6-816F-3879F97B5CBC}" type="slidenum">
               <a:rPr lang="en-US"/>
               <a:t>35</a:t>
+            </a:fld>
+            <a:endParaRPr lang="en-US"/>
+          </a:p>
+        </p:txBody>
+      </p:sp>
+    </p:spTree>
+    <p:extLst>
+      <p:ext uri="{BB962C8B-B14F-4D97-AF65-F5344CB8AC3E}">
+        <p14:creationId xmlns:p14="http://schemas.microsoft.com/office/powerpoint/2010/main" val="1024086991"/>
+      </p:ext>
+    </p:extLst>
+  </p:cSld>
+  <p:clrMapOvr>
+    <a:masterClrMapping/>
+  </p:clrMapOvr>
+</p:notes>
+</file>
+
+<file path=ppt/notesSlides/notesSlide36.xml><?xml version="1.0" encoding="utf-8"?>
+<p:notes xmlns:a="http://schemas.openxmlformats.org/drawingml/2006/main" xmlns:r="http://schemas.openxmlformats.org/officeDocument/2006/relationships" xmlns:p="http://schemas.openxmlformats.org/presentationml/2006/main">
+  <p:cSld>
+    <p:spTree>
+      <p:nvGrpSpPr>
+        <p:cNvPr id="1" name=""/>
+        <p:cNvGrpSpPr/>
+        <p:nvPr/>
+      </p:nvGrpSpPr>
+      <p:grpSpPr>
+        <a:xfrm>
+          <a:off x="0" y="0"/>
+          <a:ext cx="0" cy="0"/>
+          <a:chOff x="0" y="0"/>
+          <a:chExt cx="0" cy="0"/>
+        </a:xfrm>
+      </p:grpSpPr>
+      <p:sp>
+        <p:nvSpPr>
+          <p:cNvPr id="2" name="Slide Image Placeholder 1"/>
+          <p:cNvSpPr>
+            <a:spLocks noGrp="1" noRot="1" noChangeAspect="1"/>
+          </p:cNvSpPr>
+          <p:nvPr>
+            <p:ph type="sldImg"/>
+          </p:nvPr>
+        </p:nvSpPr>
+        <p:spPr/>
+      </p:sp>
+      <p:sp>
+        <p:nvSpPr>
+          <p:cNvPr id="3" name="Notes Placeholder 2"/>
+          <p:cNvSpPr>
+            <a:spLocks noGrp="1"/>
+          </p:cNvSpPr>
+          <p:nvPr>
+            <p:ph type="body" idx="1"/>
+          </p:nvPr>
+        </p:nvSpPr>
+        <p:spPr/>
+        <p:txBody>
+          <a:bodyPr/>
+          <a:lstStyle/>
+          <a:p>
+            <a:r>
+              <a:rPr lang="en-US" dirty="0"/>
+              <a:t/>
+            </a:r>
+            <a:endParaRPr lang="en-US" dirty="0"/>
+          </a:p>
+        </p:txBody>
+      </p:sp>
+      <p:sp>
+        <p:nvSpPr>
+          <p:cNvPr id="4" name="Slide Number Placeholder 3"/>
+          <p:cNvSpPr>
+            <a:spLocks noGrp="1"/>
+          </p:cNvSpPr>
+          <p:nvPr>
+            <p:ph type="sldNum" sz="quarter" idx="10"/>
+          </p:nvPr>
+        </p:nvSpPr>
+        <p:spPr/>
+        <p:txBody>
+          <a:bodyPr/>
+          <a:lstStyle/>
+          <a:p>
+            <a:fld id="{F7021451-1387-4CA6-816F-3879F97B5CBC}" type="slidenum">
+              <a:rPr lang="en-US"/>
+              <a:t>36</a:t>
             </a:fld>
             <a:endParaRPr lang="en-US"/>
           </a:p>
@@ -3352,7 +3441,7 @@
           <a:p>
             <a:r>
               <a:rPr lang="en-US" dirty="0"/>
-              <a:t>לוח הבקרה — היסטוריית הערכות עם טלמטריה</a:t>
+              <a:t>לוח הבקרה — שלוש הערכות אמיתיות עם הטלמטריה שלהן</a:t>
             </a:r>
             <a:endParaRPr lang="en-US" dirty="0"/>
           </a:p>
@@ -3440,7 +3529,7 @@
           <a:p>
             <a:r>
               <a:rPr lang="en-US" dirty="0"/>
-              <a:t>מסך הערכה חדשה — קליטה, Workflow, מודל ובחירת סוכנים</a:t>
+              <a:t>מסך הערכה חדשה — הבריף האמיתי של משחק המלחמה</a:t>
             </a:r>
             <a:endParaRPr lang="en-US" dirty="0"/>
           </a:p>
@@ -4391,7 +4480,7 @@
                 <a:ea typeface="Arial" pitchFamily="34" charset="-122"/>
                 <a:cs typeface="Arial" pitchFamily="34" charset="-120"/>
               </a:rPr>
-              <a:t>יומן פעילות חי — כל שאילתת חיפוש נרשמת עם השפה שבה בוצעה ומספר התוצאות שהתקבלו</a:t>
+              <a:t>יומן הפעילות שבתמונה הוא שחזור של ריצה אמיתית — שאילתות אמיתיות בעברית ובאנגלית, עם השפה ומספר התוצאות</a:t>
             </a:r>
             <a:endParaRPr lang="en-US" sz="1200" dirty="0"/>
           </a:p>
@@ -4415,7 +4504,7 @@
                 <a:ea typeface="Arial" pitchFamily="34" charset="-122"/>
                 <a:cs typeface="Arial" pitchFamily="34" charset="-120"/>
               </a:rPr>
-              <a:t>המערכת מדווחת גם על מה שחסר לה: "סוכנים לא נמצאו: humanitarian logistics" — הזמנה ליצור אותו</a:t>
+              <a:t>ניתן לראות איזה סוכן שאל מה — "מנתח BDA", "מנתח כלכלי", "מומחה אסלאם" — וכמה תוצאות חזרו</a:t>
             </a:r>
             <a:endParaRPr lang="en-US" sz="1200" dirty="0"/>
           </a:p>
@@ -4485,7 +4574,7 @@
                 <a:ea typeface="Arial" pitchFamily="34" charset="-122"/>
                 <a:cs typeface="Arial" pitchFamily="34" charset="-120"/>
               </a:rPr>
-              <a:t>מסך העיבוד — יומן פעילות חי בשלוש שפות</a:t>
+              <a:t>מסך העיבוד — שחזור יומן הפעילות של הרצה אמיתית</a:t>
             </a:r>
             <a:endParaRPr lang="en-US" sz="1000" dirty="0"/>
           </a:p>
@@ -4692,7 +4781,7 @@
                 <a:ea typeface="Arial" pitchFamily="34" charset="-122"/>
                 <a:cs typeface="Arial" pitchFamily="34" charset="-120"/>
               </a:rPr>
-              <a:t>באנר צהוב מציין רכיבים שחסרו בניתוח — סוכן או מיומנות שהיו משפרים את הדיוק, עם קישור ישיר ליצירתם</a:t>
+              <a:t>כאן רואים שלושה סוכנים ושמונה מיומנויות — חלקן מיומנויות שהצוות יצר בעצמו (skill-ai-expert, skill-common-sense)</a:t>
             </a:r>
             <a:endParaRPr lang="en-US" sz="1200" dirty="0"/>
           </a:p>
@@ -4740,7 +4829,7 @@
                 <a:ea typeface="Arial" pitchFamily="34" charset="-122"/>
                 <a:cs typeface="Arial" pitchFamily="34" charset="-120"/>
               </a:rPr>
-              <a:t>ייצוא הדו"ח כקובץ HTML עצמאי בלחיצה אחת</a:t>
+              <a:t>ייצוא הדו"ח כקובץ HTML עצמאי בלחיצה אחת — בדיוק הקובץ שממנו נבנה המדריך הזה</a:t>
             </a:r>
             <a:endParaRPr lang="en-US" sz="1200" dirty="0"/>
           </a:p>
@@ -4993,7 +5082,7 @@
                 <a:ea typeface="Arial" pitchFamily="34" charset="-122"/>
                 <a:cs typeface="Arial" pitchFamily="34" charset="-120"/>
               </a:rPr>
-              <a:t>רמת ביטחון (גבוה / בינוני / נמוך) — עם נימוק מפורש למה דווקא הרמה הזו</a:t>
+              <a:t>תשע טענות מרכזיות חולצו מהמסמך, כל אחת עם ציון ביטחון, ציון סיכון ונימוק</a:t>
             </a:r>
             <a:endParaRPr lang="en-US" sz="1200" dirty="0"/>
           </a:p>
@@ -5017,7 +5106,7 @@
                 <a:ea typeface="Arial" pitchFamily="34" charset="-122"/>
                 <a:cs typeface="Arial" pitchFamily="34" charset="-120"/>
               </a:rPr>
-              <a:t>סיכון אם שגוי — ממד נפרד לגמרי: טענה יכולה להיות בביטחון בינוני אבל בסיכון גבוה מאוד</a:t>
+              <a:t>טענה בביטחון גבוה: "AI ישפר משמעותית יכולות מחקר חולשות כבר ב-2026–2027" — אך המערכת מעירה שהיא לא מפורטת לגבי שחקנים ושוק יעד</a:t>
             </a:r>
             <a:endParaRPr lang="en-US" sz="1200" dirty="0"/>
           </a:p>
@@ -5041,7 +5130,7 @@
                 <a:ea typeface="Arial" pitchFamily="34" charset="-122"/>
                 <a:cs typeface="Arial" pitchFamily="34" charset="-120"/>
               </a:rPr>
-              <a:t>מספר המקורות התומכים, ורשימת העדויות עצמן עם קישור וסיווג אמינות</a:t>
+              <a:t>טענה בביטחון נמוך וסיכון גבוה: "יכולת ה-Attribution תגדל מ-5% ל-85%" — המערכת מציינת שאין מקור למספרים ושהם מוצגים כעובדה</a:t>
             </a:r>
             <a:endParaRPr lang="en-US" sz="1200" dirty="0"/>
           </a:p>
@@ -5065,7 +5154,7 @@
                 <a:ea typeface="Arial" pitchFamily="34" charset="-122"/>
                 <a:cs typeface="Arial" pitchFamily="34" charset="-120"/>
               </a:rPr>
-              <a:t>סיווג מקורות אוטומטי בשלוש רמות: T1 (סוכנויות מובילות), T2 (כללי), T3 (רשתות חברתיות)</a:t>
+              <a:t>שני הצירים נפרדים: טענה יכולה להיות בביטחון בינוני אך בסיכון גבוה מאוד אם תתברר כשגויה</a:t>
             </a:r>
             <a:endParaRPr lang="en-US" sz="1200" dirty="0"/>
           </a:p>
@@ -5135,7 +5224,7 @@
                 <a:ea typeface="Arial" pitchFamily="34" charset="-122"/>
                 <a:cs typeface="Arial" pitchFamily="34" charset="-120"/>
               </a:rPr>
-              <a:t>לשונית הטענות — ביטחון וסיכון כשני צירים נפרדים</a:t>
+              <a:t>תשע טענות אמיתיות — ביטחון וסיכון כשני צירים נפרדים</a:t>
             </a:r>
             <a:endParaRPr lang="en-US" sz="1000" dirty="0"/>
           </a:p>
@@ -5318,7 +5407,7 @@
                 <a:ea typeface="Arial" pitchFamily="34" charset="-122"/>
                 <a:cs typeface="Arial" pitchFamily="34" charset="-120"/>
               </a:rPr>
-              <a:t>המערכת מפרידה בין הנחה מפורשת (נכתבה) להנחה סמויה (הונחה ולא נוסחה)</a:t>
+              <a:t>תשע הנחות זוהו, רובן סמויות — כאלה שהונחו ולא נוסחו במסמך</a:t>
             </a:r>
             <a:endParaRPr lang="en-US" sz="1200" dirty="0"/>
           </a:p>
@@ -5342,7 +5431,7 @@
                 <a:ea typeface="Arial" pitchFamily="34" charset="-122"/>
                 <a:cs typeface="Arial" pitchFamily="34" charset="-120"/>
               </a:rPr>
-              <a:t>לכל הנחה: מה יקרה אם היא שגויה — במילים, לא בציון</a:t>
+              <a:t>המערכת מפרידה בין הנחה מפורשת (נכתבה) להנחה סמויה (הונחה ולא נוסחה)</a:t>
             </a:r>
             <a:endParaRPr lang="en-US" sz="1200" dirty="0"/>
           </a:p>
@@ -5366,7 +5455,7 @@
                 <a:ea typeface="Arial" pitchFamily="34" charset="-122"/>
                 <a:cs typeface="Arial" pitchFamily="34" charset="-120"/>
               </a:rPr>
-              <a:t>ההנחות הסמויות הן לרוב הממצא החשוב ביותר: הן נושאות את ההערכה ואף אחד לא בחן אותן</a:t>
+              <a:t>לכל הנחה: מה יקרה אם היא שגויה — במילים, לא בציון</a:t>
             </a:r>
             <a:endParaRPr lang="en-US" sz="1200" dirty="0"/>
           </a:p>
@@ -5390,7 +5479,7 @@
                 <a:ea typeface="Arial" pitchFamily="34" charset="-122"/>
                 <a:cs typeface="Arial" pitchFamily="34" charset="-120"/>
               </a:rPr>
-              <a:t>בדוגמה: ההנחה ש"פגיעה ביכולת מתורגמת לירידה בכוונה" נושאת שלוש מארבע הטענות המרכזיות</a:t>
+              <a:t>דוגמה אמיתית: "הקצב הטכנולוגי יהיה אחיד ורציף" — הנחה סמויה בסיכון גבוה שנושאת חלק ניכר מהמסמך</a:t>
             </a:r>
             <a:endParaRPr lang="en-US" sz="1200" dirty="0"/>
           </a:p>
@@ -5667,7 +5756,7 @@
                 <a:ea typeface="Arial" pitchFamily="34" charset="-122"/>
                 <a:cs typeface="Arial" pitchFamily="34" charset="-120"/>
               </a:rPr>
-              <a:t>כל עדות מגיעה עם מקור, תאריך פרסום וסיווג אמינות — ולא כטענה ערטילאית</a:t>
+              <a:t>כל עדות מגיעה עם מקור, קישור וסיווג אמינות — ולא כטענה ערטילאית</a:t>
             </a:r>
             <a:endParaRPr lang="en-US" sz="1200" dirty="0"/>
           </a:p>
@@ -5691,7 +5780,7 @@
                 <a:ea typeface="Arial" pitchFamily="34" charset="-122"/>
                 <a:cs typeface="Arial" pitchFamily="34" charset="-120"/>
               </a:rPr>
-              <a:t>החיפוש רץ בשלוש שפות, כך שגם סיקור מקומי שאינו באנגלית נכנס לתמונה</a:t>
+              <a:t>בהרצה זו בוצעו 34 חיפושי רשת בשלוש שפות במהלך הניתוח</a:t>
             </a:r>
             <a:endParaRPr lang="en-US" sz="1200" dirty="0"/>
           </a:p>
@@ -5968,7 +6057,7 @@
                 <a:ea typeface="Arial" pitchFamily="34" charset="-122"/>
                 <a:cs typeface="Arial" pitchFamily="34" charset="-120"/>
               </a:rPr>
-              <a:t>כל חלופה מדורגת בחומרה ובהסתברות בנפרד — כי חלופה בהסתברות נמוכה וחומרה גבוהה עדיין מחייבת היערכות</a:t>
+              <a:t>החלופות מדורגות בחומרה ובהסתברות בנפרד — כי חלופה בהסתברות נמוכה וחומרה גבוהה עדיין מחייבת היערכות</a:t>
             </a:r>
             <a:endParaRPr lang="en-US" sz="1200" dirty="0"/>
           </a:p>
@@ -5992,7 +6081,7 @@
                 <a:ea typeface="Arial" pitchFamily="34" charset="-122"/>
                 <a:cs typeface="Arial" pitchFamily="34" charset="-120"/>
               </a:rPr>
-              <a:t>לכל חלופה: עדויות תומכות, עדויות נגד ומשמעות מבצעית</a:t>
+              <a:t>לכל חלופה: עדויות תומכות, עדויות נגד ומשמעות מעשית</a:t>
             </a:r>
             <a:endParaRPr lang="en-US" sz="1200" dirty="0"/>
           </a:p>
@@ -6016,7 +6105,7 @@
                 <a:ea typeface="Arial" pitchFamily="34" charset="-122"/>
                 <a:cs typeface="Arial" pitchFamily="34" charset="-120"/>
               </a:rPr>
-              <a:t>התרחיש שההערכה המקורית הציגה כוודאי מופיע כאן כאחת מכמה חלופות — וזו בדיוק הנקודה</a:t>
+              <a:t>התרחיש שההערכה המקורית הציגה כמסלול המרכזי מופיע כאן כאחת מכמה חלופות — וזו בדיוק הנקודה</a:t>
             </a:r>
             <a:endParaRPr lang="en-US" sz="1200" dirty="0"/>
           </a:p>
@@ -6293,7 +6382,7 @@
                 <a:ea typeface="Arial" pitchFamily="34" charset="-122"/>
                 <a:cs typeface="Arial" pitchFamily="34" charset="-120"/>
               </a:rPr>
-              <a:t>המלצות אופרטיביות ולא הערות כלליות: הורד רמת ביטחון, הפרד בין יכולת לכוונה, אמת נתון ממקור שני</a:t>
+              <a:t>המלצות אופרטיביות ולא הערות כלליות — מה לשנות בהערכה ומה לבדוק לפני הפצתה</a:t>
             </a:r>
             <a:endParaRPr lang="en-US" sz="1200" dirty="0"/>
           </a:p>
@@ -6317,7 +6406,7 @@
                 <a:ea typeface="Arial" pitchFamily="34" charset="-122"/>
                 <a:cs typeface="Arial" pitchFamily="34" charset="-120"/>
               </a:rPr>
-              <a:t>הוספת אינדיקטורי אזהרה מוקדמת למעקב שוטף — מה בדיוק לנטר מכאן והלאה</a:t>
+              <a:t>המערכת מצביעה על מספרים שהוצגו כעובדה בלי מקור, ומבקשת לאמת או לנסח מחדש</a:t>
             </a:r>
             <a:endParaRPr lang="en-US" sz="1200" dirty="0"/>
           </a:p>
@@ -6341,7 +6430,7 @@
                 <a:ea typeface="Arial" pitchFamily="34" charset="-122"/>
                 <a:cs typeface="Arial" pitchFamily="34" charset="-120"/>
               </a:rPr>
-              <a:t>ניסוח מותנה של ההמלצה המבצעית במקום ניסוח מוחלט</a:t>
+              <a:t>הוספת אינדיקטורי אזהרה מוקדמת למעקב שוטף — מה בדיוק לנטר מכאן והלאה</a:t>
             </a:r>
             <a:endParaRPr lang="en-US" sz="1200" dirty="0"/>
           </a:p>
@@ -6365,7 +6454,7 @@
                 <a:ea typeface="Arial" pitchFamily="34" charset="-122"/>
                 <a:cs typeface="Arial" pitchFamily="34" charset="-120"/>
               </a:rPr>
-              <a:t>ההמלצות נגזרות מהממצאים ומצביעות אחורה על הטענה או ההנחה שהולידה אותן</a:t>
+              <a:t>כל המלצה נגזרת מממצא ומצביעה אחורה על הטענה או ההנחה שהולידה אותה</a:t>
             </a:r>
             <a:endParaRPr lang="en-US" sz="1200" dirty="0"/>
           </a:p>
@@ -6642,7 +6731,7 @@
                 <a:ea typeface="Arial" pitchFamily="34" charset="-122"/>
                 <a:cs typeface="Arial" pitchFamily="34" charset="-120"/>
               </a:rPr>
-              <a:t>ליד כל סוכן מוצגות המיומנויות שהופעלו עבורו — מה בדיוק הזין את הניתוח</a:t>
+              <a:t>שלושת הסוכנים בהרצה זו: מנתח טכנולוגיות AI, מנתח כלכלי ו-Devil's Advocate</a:t>
             </a:r>
             <a:endParaRPr lang="en-US" sz="1200" dirty="0"/>
           </a:p>
@@ -6666,7 +6755,7 @@
                 <a:ea typeface="Arial" pitchFamily="34" charset="-122"/>
                 <a:cs typeface="Arial" pitchFamily="34" charset="-120"/>
               </a:rPr>
-              <a:t>כשסוכנים חולקים על עצמם, ההבדל גלוי ולא מוחלק בסינתזה</a:t>
+              <a:t>ליד כל סוכן מוצגות המיומנויות שהופעלו עבורו — מה בדיוק הזין את הניתוח</a:t>
             </a:r>
             <a:endParaRPr lang="en-US" sz="1200" dirty="0"/>
           </a:p>
@@ -6897,7 +6986,7 @@
                 <a:ea typeface="Arial" pitchFamily="34" charset="-122"/>
                 <a:cs typeface="Arial" pitchFamily="34" charset="-120"/>
               </a:rPr>
-              <a:t>מי, מה, איפה ומתי — מחולץ אוטומטית</a:t>
+              <a:t>ישויות וציר זמן — מחולצים אוטומטית</a:t>
             </a:r>
             <a:endParaRPr lang="en-US" sz="2800" dirty="0"/>
           </a:p>
@@ -6967,7 +7056,7 @@
                 <a:ea typeface="Arial" pitchFamily="34" charset="-122"/>
                 <a:cs typeface="Arial" pitchFamily="34" charset="-120"/>
               </a:rPr>
-              <a:t>לכל ישות תפקיד או סוג, ודירוג רלוונטיות (גבוה / בינוני / נמוך)</a:t>
+              <a:t>בהרצה זו האירועים הם למעשה ציר זמן: חמישה שלבים מ-2026 עד 2031, ועוד שבעה אירועי קלף עם תאריכי יעד</a:t>
             </a:r>
             <a:endParaRPr lang="en-US" sz="1200" dirty="0"/>
           </a:p>
@@ -6991,7 +7080,7 @@
                 <a:ea typeface="Arial" pitchFamily="34" charset="-122"/>
                 <a:cs typeface="Arial" pitchFamily="34" charset="-120"/>
               </a:rPr>
-              <a:t>אירועים מגיעים עם תאריך — בסיס לבניית ציר זמן</a:t>
+              <a:t>לכל ישות דירוג רלוונטיות (גבוה / בינוני / נמוך) ותאריך, כשקיים</a:t>
             </a:r>
             <a:endParaRPr lang="en-US" sz="1200" dirty="0"/>
           </a:p>
@@ -7015,7 +7104,7 @@
                 <a:ea typeface="Arial" pitchFamily="34" charset="-122"/>
                 <a:cs typeface="Arial" pitchFamily="34" charset="-120"/>
               </a:rPr>
-              <a:t>שימושי להצלבה בין הערכות ולזיהוי מהיר של הגורמים המרכזיים</a:t>
+              <a:t>המערכת מחלצת רק מה שבמסמך — ארגון יחיד כאן, כי המסמך המקורי אינו נוקב בשמות</a:t>
             </a:r>
             <a:endParaRPr lang="en-US" sz="1200" dirty="0"/>
           </a:p>
@@ -7085,7 +7174,7 @@
                 <a:ea typeface="Arial" pitchFamily="34" charset="-122"/>
                 <a:cs typeface="Arial" pitchFamily="34" charset="-120"/>
               </a:rPr>
-              <a:t>ישויות מחולצות ומדורגות לפי רלוונטיות</a:t>
+              <a:t>ישויות ואירועים — ציר הזמן שחולץ מהמסמך</a:t>
             </a:r>
             <a:endParaRPr lang="en-US" sz="1000" dirty="0"/>
           </a:p>
@@ -7340,7 +7429,7 @@
                 <a:ea typeface="Arial" pitchFamily="34" charset="-122"/>
                 <a:cs typeface="Arial" pitchFamily="34" charset="-120"/>
               </a:rPr>
-              <a:t>לכל עדשה: הערכה, אינדיקטורים מהמסמך, ותרחישים — כולל תרחיש קיצון עם השלכות מסדר שני</a:t>
+              <a:t>בהרצה זו העדשה הראשונה חשפה את ההנחה המסוכנת ביותר: שהשינוי יהיה לינארי, ושחלון ההזדמנות ייסגר בהדרגה ולא בבת אחת</a:t>
             </a:r>
             <a:endParaRPr lang="en-US" sz="1200" dirty="0"/>
           </a:p>
@@ -7889,32 +7978,10 @@
                 <a:ea typeface="Arial" pitchFamily="34" charset="-122"/>
                 <a:cs typeface="Arial" pitchFamily="34" charset="-120"/>
               </a:rPr>
-              <a:t>16   מי, מה, איפה ומתי — מחולץ אוטומטית</a:t>
+              <a:t>16   ישויות וציר זמן — מחולצים אוטומטית</a:t>
             </a:r>
             <a:endParaRPr lang="en-US" sz="1200" dirty="0"/>
           </a:p>
-        </p:txBody>
-      </p:sp>
-      <p:sp>
-        <p:nvSpPr>
-          <p:cNvPr id="6" name="Text 4"/>
-          <p:cNvSpPr txBox="1"/>
-          <p:nvPr/>
-        </p:nvSpPr>
-        <p:spPr>
-          <a:xfrm>
-            <a:off x="548640" y="1691640"/>
-            <a:ext cx="5501488" cy="4572000"/>
-          </a:xfrm>
-          <a:prstGeom prst="rect">
-            <a:avLst/>
-          </a:prstGeom>
-          <a:noFill/>
-          <a:ln/>
-        </p:spPr>
-        <p:txBody>
-          <a:bodyPr wrap="square" lIns="0" tIns="0" rIns="0" bIns="0" rtlCol="0" anchor="t"/>
-          <a:lstStyle/>
           <a:p>
             <a:pPr algn="r" indent="0" marL="0">
               <a:lnSpc>
@@ -7935,6 +8002,28 @@
             </a:r>
             <a:endParaRPr lang="en-US" sz="1200" dirty="0"/>
           </a:p>
+        </p:txBody>
+      </p:sp>
+      <p:sp>
+        <p:nvSpPr>
+          <p:cNvPr id="6" name="Text 4"/>
+          <p:cNvSpPr txBox="1"/>
+          <p:nvPr/>
+        </p:nvSpPr>
+        <p:spPr>
+          <a:xfrm>
+            <a:off x="548640" y="1691640"/>
+            <a:ext cx="5501488" cy="4572000"/>
+          </a:xfrm>
+          <a:prstGeom prst="rect">
+            <a:avLst/>
+          </a:prstGeom>
+          <a:noFill/>
+          <a:ln/>
+        </p:spPr>
+        <p:txBody>
+          <a:bodyPr wrap="square" lIns="0" tIns="0" rIns="0" bIns="0" rtlCol="0" anchor="t"/>
+          <a:lstStyle/>
           <a:p>
             <a:pPr algn="r" indent="0" marL="0">
               <a:lnSpc>
@@ -8151,7 +8240,7 @@
                 <a:ea typeface="Arial" pitchFamily="34" charset="-122"/>
                 <a:cs typeface="Arial" pitchFamily="34" charset="-120"/>
               </a:rPr>
-              <a:t>28   Workflows — תצורות ניתוח שמורות</a:t>
+              <a:t>28   הצוות כבר הרחיב את המערכת בעצמו</a:t>
             </a:r>
             <a:endParaRPr lang="en-US" sz="1200" dirty="0"/>
           </a:p>
@@ -8171,7 +8260,7 @@
                 <a:ea typeface="Arial" pitchFamily="34" charset="-122"/>
                 <a:cs typeface="Arial" pitchFamily="34" charset="-120"/>
               </a:rPr>
-              <a:t>29   מקורות — חיבור מאגרים פרטיים</a:t>
+              <a:t>29   Workflows — תצורות ניתוח שמורות</a:t>
             </a:r>
             <a:endParaRPr lang="en-US" sz="1200" dirty="0"/>
           </a:p>
@@ -8191,7 +8280,7 @@
                 <a:ea typeface="Arial" pitchFamily="34" charset="-122"/>
                 <a:cs typeface="Arial" pitchFamily="34" charset="-120"/>
               </a:rPr>
-              <a:t>30   משתמשים והרשאות</a:t>
+              <a:t>30   מקורות — חיבור מאגרים פרטיים</a:t>
             </a:r>
             <a:endParaRPr lang="en-US" sz="1200" dirty="0"/>
           </a:p>
@@ -8211,7 +8300,7 @@
                 <a:ea typeface="Arial" pitchFamily="34" charset="-122"/>
                 <a:cs typeface="Arial" pitchFamily="34" charset="-120"/>
               </a:rPr>
-              <a:t>31   עקרונות שנבנו לתוך המערכת</a:t>
+              <a:t>31   משתמשים והרשאות</a:t>
             </a:r>
             <a:endParaRPr lang="en-US" sz="1200" dirty="0"/>
           </a:p>
@@ -8231,7 +8320,27 @@
                 <a:ea typeface="Arial" pitchFamily="34" charset="-122"/>
                 <a:cs typeface="Arial" pitchFamily="34" charset="-120"/>
               </a:rPr>
-              <a:t>32   מה המערכת נותנת לאנליסט</a:t>
+              <a:t>32   עקרונות שנבנו לתוך המערכת</a:t>
+            </a:r>
+            <a:endParaRPr lang="en-US" sz="1200" dirty="0"/>
+          </a:p>
+          <a:p>
+            <a:pPr algn="r" indent="0" marL="0">
+              <a:lnSpc>
+                <a:spcPts val="2200"/>
+              </a:lnSpc>
+              <a:buNone/>
+            </a:pPr>
+            <a:r>
+              <a:rPr lang="en-US" sz="1200" dirty="0">
+                <a:solidFill>
+                  <a:srgbClr val="3A4759"/>
+                </a:solidFill>
+                <a:latin typeface="Arial" pitchFamily="34" charset="0"/>
+                <a:ea typeface="Arial" pitchFamily="34" charset="-122"/>
+                <a:cs typeface="Arial" pitchFamily="34" charset="-120"/>
+              </a:rPr>
+              <a:t>33   מה המערכת נותנת לאנליסט</a:t>
             </a:r>
             <a:endParaRPr lang="en-US" sz="1200" dirty="0"/>
           </a:p>
@@ -8438,7 +8547,7 @@
                 <a:ea typeface="Arial" pitchFamily="34" charset="-122"/>
                 <a:cs typeface="Arial" pitchFamily="34" charset="-120"/>
               </a:rPr>
-              <a:t>פתיחת שאילתה חושפת את התוצאות הגולמיות — כותרת, קישור, תאריך, תקציר ורמת אמינות</a:t>
+              <a:t>פתיחת שאילתה חושפת את התוצאות הגולמיות — כותרת, קישור, תקציר ורמת אמינות</a:t>
             </a:r>
             <a:endParaRPr lang="en-US" sz="1200" dirty="0"/>
           </a:p>
@@ -8462,7 +8571,7 @@
                 <a:ea typeface="Arial" pitchFamily="34" charset="-122"/>
                 <a:cs typeface="Arial" pitchFamily="34" charset="-120"/>
               </a:rPr>
-              <a:t>אפשר לאמת כל ממצא בדו"ח מול המקור שהוליד אותו</a:t>
+              <a:t>גם חיפוש שלא החזיר תוצאות נרשם ומוצג — המערכת אינה מסתירה את מה שלא מצאה</a:t>
             </a:r>
             <a:endParaRPr lang="en-US" sz="1200" dirty="0"/>
           </a:p>
@@ -8486,7 +8595,7 @@
                 <a:ea typeface="Arial" pitchFamily="34" charset="-122"/>
                 <a:cs typeface="Arial" pitchFamily="34" charset="-120"/>
               </a:rPr>
-              <a:t>בסיס לביקורת מקצועית: האם הסוכן חיפש את הדבר הנכון?</a:t>
+              <a:t>אפשר לאמת כל ממצא בדו"ח מול המקור שהוליד אותו</a:t>
             </a:r>
             <a:endParaRPr lang="en-US" sz="1200" dirty="0"/>
           </a:p>
@@ -8763,7 +8872,7 @@
                 <a:ea typeface="Arial" pitchFamily="34" charset="-122"/>
                 <a:cs typeface="Arial" pitchFamily="34" charset="-120"/>
               </a:rPr>
-              <a:t>טלמטריה מדויקת: קריאות LLM, טוקני קלט, טוקני פלט וחיפושי רשת</a:t>
+              <a:t>טלמטריה מדויקת: 19 קריאות מודל, 491K טוקני קלט, 53K טוקני פלט ו-34 חיפושי רשת</a:t>
             </a:r>
             <a:endParaRPr lang="en-US" sz="1200" dirty="0"/>
           </a:p>
@@ -9064,7 +9173,7 @@
                 <a:ea typeface="Arial" pitchFamily="34" charset="-122"/>
                 <a:cs typeface="Arial" pitchFamily="34" charset="-120"/>
               </a:rPr>
-              <a:t>המסמך שנקלט נשמר במלואו וזמין בלשונית נפרדת</a:t>
+              <a:t>המסמך שנקלט נשמר במלואו וזמין בלשונית נפרדת — כאן בריף בן 2,819 מילים</a:t>
             </a:r>
             <a:endParaRPr lang="en-US" sz="1200" dirty="0"/>
           </a:p>
@@ -10181,7 +10290,7 @@
                 <a:ea typeface="Arial" pitchFamily="34" charset="-122"/>
                 <a:cs typeface="Arial" pitchFamily="34" charset="-120"/>
               </a:rPr>
-              <a:t>שלב 1 באשף יצירת המיומנות</a:t>
+              <a:t>שלב 1 באשף — הזנה לדוגמה של מיומנות חדשה</a:t>
             </a:r>
             <a:endParaRPr lang="en-US" sz="1000" dirty="0"/>
           </a:p>
@@ -12103,11 +12212,11 @@
         <p:spPr>
           <a:xfrm>
             <a:off x="548640" y="5166360"/>
-            <a:ext cx="11094415" cy="1097280"/>
+            <a:ext cx="11094415" cy="758952"/>
           </a:xfrm>
           <a:prstGeom prst="roundRect">
             <a:avLst>
-              <a:gd name="adj" fmla="val 5833"/>
+              <a:gd name="adj" fmla="val 8434"/>
             </a:avLst>
           </a:prstGeom>
           <a:solidFill>
@@ -12130,7 +12239,7 @@
         <p:spPr>
           <a:xfrm>
             <a:off x="777240" y="5166360"/>
-            <a:ext cx="10637215" cy="1097280"/>
+            <a:ext cx="10637215" cy="758952"/>
           </a:xfrm>
           <a:prstGeom prst="rect">
             <a:avLst/>
@@ -12255,7 +12364,7 @@
                 <a:ea typeface="Arial" pitchFamily="34" charset="-122"/>
                 <a:cs typeface="Arial" pitchFamily="34" charset="-120"/>
               </a:rPr>
-              <a:t>המנוע</a:t>
+              <a:t>הרחבה בפועל</a:t>
             </a:r>
             <a:endParaRPr lang="en-US" sz="1100" dirty="0"/>
           </a:p>
@@ -12294,7 +12403,7 @@
                 <a:ea typeface="Arial" pitchFamily="34" charset="-122"/>
                 <a:cs typeface="Arial" pitchFamily="34" charset="-120"/>
               </a:rPr>
-              <a:t>Workflows — תצורות ניתוח שמורות</a:t>
+              <a:t>הצוות כבר הרחיב את המערכת בעצמו</a:t>
             </a:r>
             <a:endParaRPr lang="en-US" sz="2800" dirty="0"/>
           </a:p>
@@ -12302,14 +12411,66 @@
       </p:sp>
       <p:sp>
         <p:nvSpPr>
-          <p:cNvPr id="5" name="Text 3"/>
+          <p:cNvPr id="5" name="Shape 3"/>
+          <p:cNvSpPr/>
+          <p:nvPr/>
+        </p:nvSpPr>
+        <p:spPr>
+          <a:xfrm>
+            <a:off x="6210148" y="1737360"/>
+            <a:ext cx="5432908" cy="960120"/>
+          </a:xfrm>
+          <a:prstGeom prst="roundRect">
+            <a:avLst>
+              <a:gd name="adj" fmla="val 6667"/>
+            </a:avLst>
+          </a:prstGeom>
+          <a:solidFill>
+            <a:srgbClr val="FFFFFF"/>
+          </a:solidFill>
+          <a:ln w="12700">
+            <a:solidFill>
+              <a:srgbClr val="DDE3EC"/>
+            </a:solidFill>
+            <a:prstDash val="solid"/>
+          </a:ln>
+        </p:spPr>
+      </p:sp>
+      <p:sp>
+        <p:nvSpPr>
+          <p:cNvPr id="6" name="Shape 4"/>
+          <p:cNvSpPr/>
+          <p:nvPr/>
+        </p:nvSpPr>
+        <p:spPr>
+          <a:xfrm>
+            <a:off x="11368735" y="2162556"/>
+            <a:ext cx="109728" cy="109728"/>
+          </a:xfrm>
+          <a:prstGeom prst="ellipse">
+            <a:avLst/>
+          </a:prstGeom>
+          <a:solidFill>
+            <a:srgbClr val="2A5298"/>
+          </a:solidFill>
+          <a:ln w="12700">
+            <a:solidFill>
+              <a:srgbClr val="2A5298"/>
+            </a:solidFill>
+            <a:prstDash val="solid"/>
+          </a:ln>
+        </p:spPr>
+      </p:sp>
+      <p:sp>
+        <p:nvSpPr>
+          <p:cNvPr id="7" name="Text 5"/>
           <p:cNvSpPr txBox="1"/>
           <p:nvPr/>
         </p:nvSpPr>
         <p:spPr>
           <a:xfrm>
-            <a:off x="7711135" y="1737360"/>
-            <a:ext cx="3931920" cy="4480560"/>
+            <a:off x="6411316" y="1792224"/>
+            <a:ext cx="4774540" cy="850392"/>
           </a:xfrm>
           <a:prstGeom prst="rect">
             <a:avLst/>
@@ -12318,173 +12479,378 @@
           <a:ln/>
         </p:spPr>
         <p:txBody>
-          <a:bodyPr wrap="square" lIns="0" tIns="0" rIns="0" bIns="0" rtlCol="0" anchor="t"/>
-          <a:lstStyle/>
-          <a:p>
-            <a:pPr algn="r" marL="342900" indent="-342900">
+          <a:bodyPr wrap="square" lIns="0" tIns="0" rIns="0" bIns="0" rtlCol="0" anchor="ctr"/>
+          <a:lstStyle/>
+          <a:p>
+            <a:pPr rtl="1" algn="r" indent="0" marL="0">
+              <a:lnSpc>
+                <a:spcPts val="1600"/>
+              </a:lnSpc>
+              <a:buNone/>
+            </a:pPr>
+            <a:r>
+              <a:rPr lang="en-US" sz="1200" dirty="0">
+                <a:solidFill>
+                  <a:srgbClr val="3A4759"/>
+                </a:solidFill>
+                <a:latin typeface="Arial" pitchFamily="34" charset="0"/>
+                <a:ea typeface="Arial" pitchFamily="34" charset="-122"/>
+                <a:cs typeface="Arial" pitchFamily="34" charset="-120"/>
+              </a:rPr>
+              <a:t>שלוש ההרצות שבמדריך הופעלו עם סוכנים שהצוות יצר: "מנתח טכנולוגיות AI", "סוכן משחקי מלחמה", "מומחה אסלאם", "מומחה איסלאם שיעי"</a:t>
+            </a:r>
+            <a:endParaRPr lang="en-US" sz="1200" dirty="0"/>
+          </a:p>
+        </p:txBody>
+      </p:sp>
+      <p:sp>
+        <p:nvSpPr>
+          <p:cNvPr id="8" name="Shape 6"/>
+          <p:cNvSpPr/>
+          <p:nvPr/>
+        </p:nvSpPr>
+        <p:spPr>
+          <a:xfrm>
+            <a:off x="6210148" y="2843784"/>
+            <a:ext cx="5432908" cy="960120"/>
+          </a:xfrm>
+          <a:prstGeom prst="roundRect">
+            <a:avLst>
+              <a:gd name="adj" fmla="val 6667"/>
+            </a:avLst>
+          </a:prstGeom>
+          <a:solidFill>
+            <a:srgbClr val="FFFFFF"/>
+          </a:solidFill>
+          <a:ln w="12700">
+            <a:solidFill>
+              <a:srgbClr val="DDE3EC"/>
+            </a:solidFill>
+            <a:prstDash val="solid"/>
+          </a:ln>
+        </p:spPr>
+      </p:sp>
+      <p:sp>
+        <p:nvSpPr>
+          <p:cNvPr id="9" name="Shape 7"/>
+          <p:cNvSpPr/>
+          <p:nvPr/>
+        </p:nvSpPr>
+        <p:spPr>
+          <a:xfrm>
+            <a:off x="11368735" y="3268980"/>
+            <a:ext cx="109728" cy="109728"/>
+          </a:xfrm>
+          <a:prstGeom prst="ellipse">
+            <a:avLst/>
+          </a:prstGeom>
+          <a:solidFill>
+            <a:srgbClr val="2A5298"/>
+          </a:solidFill>
+          <a:ln w="12700">
+            <a:solidFill>
+              <a:srgbClr val="2A5298"/>
+            </a:solidFill>
+            <a:prstDash val="solid"/>
+          </a:ln>
+        </p:spPr>
+      </p:sp>
+      <p:sp>
+        <p:nvSpPr>
+          <p:cNvPr id="10" name="Text 8"/>
+          <p:cNvSpPr txBox="1"/>
+          <p:nvPr/>
+        </p:nvSpPr>
+        <p:spPr>
+          <a:xfrm>
+            <a:off x="6411316" y="2898648"/>
+            <a:ext cx="4774540" cy="850392"/>
+          </a:xfrm>
+          <a:prstGeom prst="rect">
+            <a:avLst/>
+          </a:prstGeom>
+          <a:noFill/>
+          <a:ln/>
+        </p:spPr>
+        <p:txBody>
+          <a:bodyPr wrap="square" lIns="0" tIns="0" rIns="0" bIns="0" rtlCol="0" anchor="ctr"/>
+          <a:lstStyle/>
+          <a:p>
+            <a:pPr rtl="1" algn="r" indent="0" marL="0">
+              <a:lnSpc>
+                <a:spcPts val="1600"/>
+              </a:lnSpc>
+              <a:buNone/>
+            </a:pPr>
+            <a:r>
+              <a:rPr lang="en-US" sz="1200" dirty="0">
+                <a:solidFill>
+                  <a:srgbClr val="3A4759"/>
+                </a:solidFill>
+                <a:latin typeface="Arial" pitchFamily="34" charset="0"/>
+                <a:ea typeface="Arial" pitchFamily="34" charset="-122"/>
+                <a:cs typeface="Arial" pitchFamily="34" charset="-120"/>
+              </a:rPr>
+              <a:t>ולצידם מיומנויות שנכתבו בבית: skill-ai-expert, skill-advanced-model-architectures, skill-islamic-theology, skill-common-sense ועוד</a:t>
+            </a:r>
+            <a:endParaRPr lang="en-US" sz="1200" dirty="0"/>
+          </a:p>
+        </p:txBody>
+      </p:sp>
+      <p:sp>
+        <p:nvSpPr>
+          <p:cNvPr id="11" name="Shape 9"/>
+          <p:cNvSpPr/>
+          <p:nvPr/>
+        </p:nvSpPr>
+        <p:spPr>
+          <a:xfrm>
+            <a:off x="548640" y="1737360"/>
+            <a:ext cx="5432908" cy="960120"/>
+          </a:xfrm>
+          <a:prstGeom prst="roundRect">
+            <a:avLst>
+              <a:gd name="adj" fmla="val 6667"/>
+            </a:avLst>
+          </a:prstGeom>
+          <a:solidFill>
+            <a:srgbClr val="FFFFFF"/>
+          </a:solidFill>
+          <a:ln w="12700">
+            <a:solidFill>
+              <a:srgbClr val="DDE3EC"/>
+            </a:solidFill>
+            <a:prstDash val="solid"/>
+          </a:ln>
+        </p:spPr>
+      </p:sp>
+      <p:sp>
+        <p:nvSpPr>
+          <p:cNvPr id="12" name="Shape 10"/>
+          <p:cNvSpPr/>
+          <p:nvPr/>
+        </p:nvSpPr>
+        <p:spPr>
+          <a:xfrm>
+            <a:off x="5707228" y="2162556"/>
+            <a:ext cx="109728" cy="109728"/>
+          </a:xfrm>
+          <a:prstGeom prst="ellipse">
+            <a:avLst/>
+          </a:prstGeom>
+          <a:solidFill>
+            <a:srgbClr val="2A5298"/>
+          </a:solidFill>
+          <a:ln w="12700">
+            <a:solidFill>
+              <a:srgbClr val="2A5298"/>
+            </a:solidFill>
+            <a:prstDash val="solid"/>
+          </a:ln>
+        </p:spPr>
+      </p:sp>
+      <p:sp>
+        <p:nvSpPr>
+          <p:cNvPr id="13" name="Text 11"/>
+          <p:cNvSpPr txBox="1"/>
+          <p:nvPr/>
+        </p:nvSpPr>
+        <p:spPr>
+          <a:xfrm>
+            <a:off x="749808" y="1792224"/>
+            <a:ext cx="4774540" cy="850392"/>
+          </a:xfrm>
+          <a:prstGeom prst="rect">
+            <a:avLst/>
+          </a:prstGeom>
+          <a:noFill/>
+          <a:ln/>
+        </p:spPr>
+        <p:txBody>
+          <a:bodyPr wrap="square" lIns="0" tIns="0" rIns="0" bIns="0" rtlCol="0" anchor="ctr"/>
+          <a:lstStyle/>
+          <a:p>
+            <a:pPr rtl="1" algn="r" indent="0" marL="0">
+              <a:lnSpc>
+                <a:spcPts val="1600"/>
+              </a:lnSpc>
+              <a:buNone/>
+            </a:pPr>
+            <a:r>
+              <a:rPr lang="en-US" sz="1200" dirty="0">
+                <a:solidFill>
+                  <a:srgbClr val="3A4759"/>
+                </a:solidFill>
+                <a:latin typeface="Arial" pitchFamily="34" charset="0"/>
+                <a:ea typeface="Arial" pitchFamily="34" charset="-122"/>
+                <a:cs typeface="Arial" pitchFamily="34" charset="-120"/>
+              </a:rPr>
+              <a:t>אף אחת מהן אינה חלק מהמאגר המובנה — כולן נוצרו מהממשק, בלי שורת קוד</a:t>
+            </a:r>
+            <a:endParaRPr lang="en-US" sz="1200" dirty="0"/>
+          </a:p>
+        </p:txBody>
+      </p:sp>
+      <p:sp>
+        <p:nvSpPr>
+          <p:cNvPr id="14" name="Shape 12"/>
+          <p:cNvSpPr/>
+          <p:nvPr/>
+        </p:nvSpPr>
+        <p:spPr>
+          <a:xfrm>
+            <a:off x="548640" y="2843784"/>
+            <a:ext cx="5432908" cy="960120"/>
+          </a:xfrm>
+          <a:prstGeom prst="roundRect">
+            <a:avLst>
+              <a:gd name="adj" fmla="val 6667"/>
+            </a:avLst>
+          </a:prstGeom>
+          <a:solidFill>
+            <a:srgbClr val="FFFFFF"/>
+          </a:solidFill>
+          <a:ln w="12700">
+            <a:solidFill>
+              <a:srgbClr val="DDE3EC"/>
+            </a:solidFill>
+            <a:prstDash val="solid"/>
+          </a:ln>
+        </p:spPr>
+      </p:sp>
+      <p:sp>
+        <p:nvSpPr>
+          <p:cNvPr id="15" name="Shape 13"/>
+          <p:cNvSpPr/>
+          <p:nvPr/>
+        </p:nvSpPr>
+        <p:spPr>
+          <a:xfrm>
+            <a:off x="5707228" y="3268980"/>
+            <a:ext cx="109728" cy="109728"/>
+          </a:xfrm>
+          <a:prstGeom prst="ellipse">
+            <a:avLst/>
+          </a:prstGeom>
+          <a:solidFill>
+            <a:srgbClr val="2A5298"/>
+          </a:solidFill>
+          <a:ln w="12700">
+            <a:solidFill>
+              <a:srgbClr val="2A5298"/>
+            </a:solidFill>
+            <a:prstDash val="solid"/>
+          </a:ln>
+        </p:spPr>
+      </p:sp>
+      <p:sp>
+        <p:nvSpPr>
+          <p:cNvPr id="16" name="Text 14"/>
+          <p:cNvSpPr txBox="1"/>
+          <p:nvPr/>
+        </p:nvSpPr>
+        <p:spPr>
+          <a:xfrm>
+            <a:off x="749808" y="2898648"/>
+            <a:ext cx="4774540" cy="850392"/>
+          </a:xfrm>
+          <a:prstGeom prst="rect">
+            <a:avLst/>
+          </a:prstGeom>
+          <a:noFill/>
+          <a:ln/>
+        </p:spPr>
+        <p:txBody>
+          <a:bodyPr wrap="square" lIns="0" tIns="0" rIns="0" bIns="0" rtlCol="0" anchor="ctr"/>
+          <a:lstStyle/>
+          <a:p>
+            <a:pPr rtl="1" algn="r" indent="0" marL="0">
+              <a:lnSpc>
+                <a:spcPts val="1600"/>
+              </a:lnSpc>
+              <a:buNone/>
+            </a:pPr>
+            <a:r>
+              <a:rPr lang="en-US" sz="1200" dirty="0">
+                <a:solidFill>
+                  <a:srgbClr val="3A4759"/>
+                </a:solidFill>
+                <a:latin typeface="Arial" pitchFamily="34" charset="0"/>
+                <a:ea typeface="Arial" pitchFamily="34" charset="-122"/>
+                <a:cs typeface="Arial" pitchFamily="34" charset="-120"/>
+              </a:rPr>
+              <a:t>זה ההבדל בין כלי שמגיע עם ידע קבוע לבין מערכת שהידע שלה גדל עם הצוות</a:t>
+            </a:r>
+            <a:endParaRPr lang="en-US" sz="1200" dirty="0"/>
+          </a:p>
+        </p:txBody>
+      </p:sp>
+      <p:sp>
+        <p:nvSpPr>
+          <p:cNvPr id="17" name="Shape 15"/>
+          <p:cNvSpPr/>
+          <p:nvPr/>
+        </p:nvSpPr>
+        <p:spPr>
+          <a:xfrm>
+            <a:off x="548640" y="4059936"/>
+            <a:ext cx="11094415" cy="758952"/>
+          </a:xfrm>
+          <a:prstGeom prst="roundRect">
+            <a:avLst>
+              <a:gd name="adj" fmla="val 8434"/>
+            </a:avLst>
+          </a:prstGeom>
+          <a:solidFill>
+            <a:srgbClr val="E9EDF5"/>
+          </a:solidFill>
+          <a:ln w="12700">
+            <a:solidFill>
+              <a:srgbClr val="E9EDF5"/>
+            </a:solidFill>
+            <a:prstDash val="solid"/>
+          </a:ln>
+        </p:spPr>
+      </p:sp>
+      <p:sp>
+        <p:nvSpPr>
+          <p:cNvPr id="18" name="Text 16"/>
+          <p:cNvSpPr txBox="1"/>
+          <p:nvPr/>
+        </p:nvSpPr>
+        <p:spPr>
+          <a:xfrm>
+            <a:off x="777240" y="4059936"/>
+            <a:ext cx="10637215" cy="758952"/>
+          </a:xfrm>
+          <a:prstGeom prst="rect">
+            <a:avLst/>
+          </a:prstGeom>
+          <a:noFill/>
+          <a:ln/>
+        </p:spPr>
+        <p:txBody>
+          <a:bodyPr wrap="square" lIns="0" tIns="0" rIns="0" bIns="0" rtlCol="0" anchor="ctr"/>
+          <a:lstStyle/>
+          <a:p>
+            <a:pPr rtl="1" algn="r" indent="0" marL="0">
               <a:lnSpc>
                 <a:spcPts val="1700"/>
               </a:lnSpc>
-              <a:spcAft>
-                <a:spcPts val="900"/>
-              </a:spcAft>
-              <a:buSzPct val="100000"/>
-              <a:buChar char="•"/>
-            </a:pPr>
-            <a:r>
-              <a:rPr lang="en-US" sz="1200" dirty="0">
-                <a:solidFill>
-                  <a:srgbClr val="3A4759"/>
-                </a:solidFill>
-                <a:latin typeface="Arial" pitchFamily="34" charset="0"/>
-                <a:ea typeface="Arial" pitchFamily="34" charset="-122"/>
-                <a:cs typeface="Arial" pitchFamily="34" charset="-120"/>
-              </a:rPr>
-              <a:t>Workflow מקבץ סוכנים, מילות הפעלה אוטומטית ומיקוד סינתזה תחת שם אחד</a:t>
+              <a:buNone/>
+            </a:pPr>
+            <a:r>
+              <a:rPr lang="en-US" sz="1200" b="1" dirty="0">
+                <a:solidFill>
+                  <a:srgbClr val="0F2447"/>
+                </a:solidFill>
+                <a:latin typeface="Arial" pitchFamily="34" charset="0"/>
+                <a:ea typeface="Arial" pitchFamily="34" charset="-122"/>
+                <a:cs typeface="Arial" pitchFamily="34" charset="-120"/>
+              </a:rPr>
+              <a:t>המבחן האמיתי של ארכיטקטורת המיומנויות והסוכנים אינו במה שהיא מגיעה איתו, אלא במה שנוסף לה אחר כך. שלוש ההרצות שבמדריך מדגימות בדיוק את זה: הן הופעלו ברובן על סוכנים ומיומנויות שלא היו במערכת ביום שהותקנה.</a:t>
             </a:r>
             <a:endParaRPr lang="en-US" sz="1200" dirty="0"/>
-          </a:p>
-          <a:p>
-            <a:pPr algn="r" marL="342900" indent="-342900">
-              <a:lnSpc>
-                <a:spcPts val="1700"/>
-              </a:lnSpc>
-              <a:spcAft>
-                <a:spcPts val="900"/>
-              </a:spcAft>
-              <a:buSzPct val="100000"/>
-              <a:buChar char="•"/>
-            </a:pPr>
-            <a:r>
-              <a:rPr lang="en-US" sz="1200" dirty="0">
-                <a:solidFill>
-                  <a:srgbClr val="3A4759"/>
-                </a:solidFill>
-                <a:latin typeface="Arial" pitchFamily="34" charset="0"/>
-                <a:ea typeface="Arial" pitchFamily="34" charset="-122"/>
-                <a:cs typeface="Arial" pitchFamily="34" charset="-120"/>
-              </a:rPr>
-              <a:t>תצורות מובנות: הערכת איום, הערכת הפסקת אש — ואפשר להוסיף משלכם</a:t>
-            </a:r>
-            <a:endParaRPr lang="en-US" sz="1200" dirty="0"/>
-          </a:p>
-          <a:p>
-            <a:pPr algn="r" marL="342900" indent="-342900">
-              <a:lnSpc>
-                <a:spcPts val="1700"/>
-              </a:lnSpc>
-              <a:spcAft>
-                <a:spcPts val="900"/>
-              </a:spcAft>
-              <a:buSzPct val="100000"/>
-              <a:buChar char="•"/>
-            </a:pPr>
-            <a:r>
-              <a:rPr lang="en-US" sz="1200" dirty="0">
-                <a:solidFill>
-                  <a:srgbClr val="3A4759"/>
-                </a:solidFill>
-                <a:latin typeface="Arial" pitchFamily="34" charset="0"/>
-                <a:ea typeface="Arial" pitchFamily="34" charset="-122"/>
-                <a:cs typeface="Arial" pitchFamily="34" charset="-120"/>
-              </a:rPr>
-              <a:t>מיקוד הסינתזה מכוון את הדו"ח הסופי: על מה להתמקד ואיזו שאלה לענות</a:t>
-            </a:r>
-            <a:endParaRPr lang="en-US" sz="1200" dirty="0"/>
-          </a:p>
-          <a:p>
-            <a:pPr algn="r" marL="342900" indent="-342900">
-              <a:lnSpc>
-                <a:spcPts val="1700"/>
-              </a:lnSpc>
-              <a:spcAft>
-                <a:spcPts val="900"/>
-              </a:spcAft>
-              <a:buSzPct val="100000"/>
-              <a:buChar char="•"/>
-            </a:pPr>
-            <a:r>
-              <a:rPr lang="en-US" sz="1200" dirty="0">
-                <a:solidFill>
-                  <a:srgbClr val="3A4759"/>
-                </a:solidFill>
-                <a:latin typeface="Arial" pitchFamily="34" charset="0"/>
-                <a:ea typeface="Arial" pitchFamily="34" charset="-122"/>
-                <a:cs typeface="Arial" pitchFamily="34" charset="-120"/>
-              </a:rPr>
-              <a:t>כשמסמך מכיל את מילות ההפעלה, התצורה נבחרת אוטומטית במסך ההערכה החדשה</a:t>
-            </a:r>
-            <a:endParaRPr lang="en-US" sz="1200" dirty="0"/>
-          </a:p>
-        </p:txBody>
-      </p:sp>
-      <p:pic>
-        <p:nvPicPr>
-          <p:cNvPr id="6" name="Image 0" descr="/home/user/flightzone/docs/avar-guide/assets/30-workflows.jpg">    </p:cNvPr>
-          <p:cNvPicPr>
-            <a:picLocks noChangeAspect="1"/>
-          </p:cNvPicPr>
-          <p:nvPr/>
-        </p:nvPicPr>
-        <p:blipFill>
-          <a:blip r:embed="rId1"/>
-          <a:stretch>
-            <a:fillRect/>
-          </a:stretch>
-        </p:blipFill>
-        <p:spPr>
-          <a:xfrm>
-            <a:off x="595732" y="1737360"/>
-            <a:ext cx="6656832" cy="4160520"/>
-          </a:xfrm>
-          <a:prstGeom prst="rect">
-            <a:avLst/>
-          </a:prstGeom>
-          <a:effectLst>
-            <a:outerShdw sx="100000" sy="100000" kx="0" ky="0" algn="bl" rotWithShape="0" blurRad="177800" dist="50800" dir="5400000">
-              <a:srgbClr val="0F2447">
-                <a:alpha val="22000"/>
-              </a:srgbClr>
-            </a:outerShdw>
-          </a:effectLst>
-        </p:spPr>
-      </p:pic>
-      <p:sp>
-        <p:nvSpPr>
-          <p:cNvPr id="7" name="Text 4"/>
-          <p:cNvSpPr txBox="1"/>
-          <p:nvPr/>
-        </p:nvSpPr>
-        <p:spPr>
-          <a:xfrm>
-            <a:off x="548640" y="6007608"/>
-            <a:ext cx="6751015" cy="292608"/>
-          </a:xfrm>
-          <a:prstGeom prst="rect">
-            <a:avLst/>
-          </a:prstGeom>
-          <a:noFill/>
-          <a:ln/>
-        </p:spPr>
-        <p:txBody>
-          <a:bodyPr wrap="square" lIns="0" tIns="0" rIns="0" bIns="0" rtlCol="0" anchor="ctr"/>
-          <a:lstStyle/>
-          <a:p>
-            <a:pPr rtl="1" algn="ctr" indent="0" marL="0">
-              <a:buNone/>
-            </a:pPr>
-            <a:r>
-              <a:rPr lang="en-US" sz="1000" dirty="0">
-                <a:solidFill>
-                  <a:srgbClr val="7B8798"/>
-                </a:solidFill>
-                <a:latin typeface="Arial" pitchFamily="34" charset="0"/>
-                <a:ea typeface="Arial" pitchFamily="34" charset="-122"/>
-                <a:cs typeface="Arial" pitchFamily="34" charset="-120"/>
-              </a:rPr>
-              <a:t>ניהול Workflows — תצורות ניתוח לשימוש חוזר</a:t>
-            </a:r>
-            <a:endParaRPr lang="en-US" sz="1000" dirty="0"/>
           </a:p>
         </p:txBody>
       </p:sp>
@@ -12619,7 +12985,7 @@
                 <a:ea typeface="Arial" pitchFamily="34" charset="-122"/>
                 <a:cs typeface="Arial" pitchFamily="34" charset="-120"/>
               </a:rPr>
-              <a:t>מקורות — חיבור מאגרים פרטיים</a:t>
+              <a:t>Workflows — תצורות ניתוח שמורות</a:t>
             </a:r>
             <a:endParaRPr lang="en-US" sz="2800" dirty="0"/>
           </a:p>
@@ -12665,7 +13031,7 @@
                 <a:ea typeface="Arial" pitchFamily="34" charset="-122"/>
                 <a:cs typeface="Arial" pitchFamily="34" charset="-120"/>
               </a:rPr>
-              <a:t>מעבר לחיפוש הרשת: חיבור מקורות API פרטיים לצד ארגוני או לארכיון פנימי</a:t>
+              <a:t>Workflow מקבץ סוכנים, מילות הפעלה אוטומטית ומיקוד סינתזה תחת שם אחד</a:t>
             </a:r>
             <a:endParaRPr lang="en-US" sz="1200" dirty="0"/>
           </a:p>
@@ -12689,7 +13055,7 @@
                 <a:ea typeface="Arial" pitchFamily="34" charset="-122"/>
                 <a:cs typeface="Arial" pitchFamily="34" charset="-120"/>
               </a:rPr>
-              <a:t>תמיכה ב-GET ו-POST, עם אימות ללא / משתמש-סיסמה / מפתח API</a:t>
+              <a:t>תצורות מובנות: הערכת איום, הערכת הפסקת אש — ואפשר להוסיף משלכם</a:t>
             </a:r>
             <a:endParaRPr lang="en-US" sz="1200" dirty="0"/>
           </a:p>
@@ -12713,7 +13079,7 @@
                 <a:ea typeface="Arial" pitchFamily="34" charset="-122"/>
                 <a:cs typeface="Arial" pitchFamily="34" charset="-120"/>
               </a:rPr>
-              <a:t>מיפוי מבנה התשובה כך שכל מקור מחזיר תוצאות בפורמט אחיד</a:t>
+              <a:t>מיקוד הסינתזה מכוון את הדו"ח הסופי: על מה להתמקד ואיזו שאלה לענות</a:t>
             </a:r>
             <a:endParaRPr lang="en-US" sz="1200" dirty="0"/>
           </a:p>
@@ -12737,7 +13103,7 @@
                 <a:ea typeface="Arial" pitchFamily="34" charset="-122"/>
                 <a:cs typeface="Arial" pitchFamily="34" charset="-120"/>
               </a:rPr>
-              <a:t>פרטי ההזדהות נשמרים בצד השרת ומוסתרים בממשק — הם לעולם לא מגיעים לדפדפן</a:t>
+              <a:t>כשמסמך מכיל את מילות ההפעלה, התצורה נבחרת אוטומטית במסך ההערכה החדשה</a:t>
             </a:r>
             <a:endParaRPr lang="en-US" sz="1200" dirty="0"/>
           </a:p>
@@ -12745,7 +13111,7 @@
       </p:sp>
       <p:pic>
         <p:nvPicPr>
-          <p:cNvPr id="6" name="Image 0" descr="/home/user/flightzone/docs/avar-guide/assets/31-sources.jpg">    </p:cNvPr>
+          <p:cNvPr id="6" name="Image 0" descr="/home/user/flightzone/docs/avar-guide/assets/30-workflows.jpg">    </p:cNvPr>
           <p:cNvPicPr>
             <a:picLocks noChangeAspect="1"/>
           </p:cNvPicPr>
@@ -12807,7 +13173,7 @@
                 <a:ea typeface="Arial" pitchFamily="34" charset="-122"/>
                 <a:cs typeface="Arial" pitchFamily="34" charset="-120"/>
               </a:rPr>
-              <a:t>ניהול מקורות — חיבור מאגרי מידע פרטיים</a:t>
+              <a:t>ניהול Workflows — תצורות ניתוח לשימוש חוזר</a:t>
             </a:r>
             <a:endParaRPr lang="en-US" sz="1000" dirty="0"/>
           </a:p>
@@ -12905,7 +13271,7 @@
                 <a:ea typeface="Arial" pitchFamily="34" charset="-122"/>
                 <a:cs typeface="Arial" pitchFamily="34" charset="-120"/>
               </a:rPr>
-              <a:t>ניהול</a:t>
+              <a:t>המנוע</a:t>
             </a:r>
             <a:endParaRPr lang="en-US" sz="1100" dirty="0"/>
           </a:p>
@@ -12944,7 +13310,7 @@
                 <a:ea typeface="Arial" pitchFamily="34" charset="-122"/>
                 <a:cs typeface="Arial" pitchFamily="34" charset="-120"/>
               </a:rPr>
-              <a:t>משתמשים והרשאות</a:t>
+              <a:t>מקורות — חיבור מאגרים פרטיים</a:t>
             </a:r>
             <a:endParaRPr lang="en-US" sz="2800" dirty="0"/>
           </a:p>
@@ -12990,7 +13356,7 @@
                 <a:ea typeface="Arial" pitchFamily="34" charset="-122"/>
                 <a:cs typeface="Arial" pitchFamily="34" charset="-120"/>
               </a:rPr>
-              <a:t>שני תפקידים: מנהל מערכת ואנליסט</a:t>
+              <a:t>מעבר לחיפוש הרשת: חיבור מקורות API פרטיים לצד ארגוני או לארכיון פנימי</a:t>
             </a:r>
             <a:endParaRPr lang="en-US" sz="1200" dirty="0"/>
           </a:p>
@@ -13014,7 +13380,7 @@
                 <a:ea typeface="Arial" pitchFamily="34" charset="-122"/>
                 <a:cs typeface="Arial" pitchFamily="34" charset="-120"/>
               </a:rPr>
-              <a:t>יצירת משתמשים, איפוס סיסמאות והסרה — למנהל בלבד</a:t>
+              <a:t>תמיכה ב-GET ו-POST, עם אימות ללא / משתמש-סיסמה / מפתח API</a:t>
             </a:r>
             <a:endParaRPr lang="en-US" sz="1200" dirty="0"/>
           </a:p>
@@ -13038,7 +13404,7 @@
                 <a:ea typeface="Arial" pitchFamily="34" charset="-122"/>
                 <a:cs typeface="Arial" pitchFamily="34" charset="-120"/>
               </a:rPr>
-              <a:t>סיסמאות נשמרות כ-hash בלבד (bcrypt) ולעולם לא כטקסט גלוי</a:t>
+              <a:t>מיפוי מבנה התשובה כך שכל מקור מחזיר תוצאות בפורמט אחיד</a:t>
             </a:r>
             <a:endParaRPr lang="en-US" sz="1200" dirty="0"/>
           </a:p>
@@ -13062,7 +13428,7 @@
                 <a:ea typeface="Arial" pitchFamily="34" charset="-122"/>
                 <a:cs typeface="Arial" pitchFamily="34" charset="-120"/>
               </a:rPr>
-              <a:t>מסך ניהול המשתמשים אינו מוצג כלל למי שאינו מנהל</a:t>
+              <a:t>פרטי ההזדהות נשמרים בצד השרת ומוסתרים בממשק — הם לעולם לא מגיעים לדפדפן</a:t>
             </a:r>
             <a:endParaRPr lang="en-US" sz="1200" dirty="0"/>
           </a:p>
@@ -13070,7 +13436,7 @@
       </p:sp>
       <p:pic>
         <p:nvPicPr>
-          <p:cNvPr id="6" name="Image 0" descr="/home/user/flightzone/docs/avar-guide/assets/32-users.jpg">    </p:cNvPr>
+          <p:cNvPr id="6" name="Image 0" descr="/home/user/flightzone/docs/avar-guide/assets/31-sources.jpg">    </p:cNvPr>
           <p:cNvPicPr>
             <a:picLocks noChangeAspect="1"/>
           </p:cNvPicPr>
@@ -13132,7 +13498,7 @@
                 <a:ea typeface="Arial" pitchFamily="34" charset="-122"/>
                 <a:cs typeface="Arial" pitchFamily="34" charset="-120"/>
               </a:rPr>
-              <a:t>ניהול משתמשים — למנהל מערכת בלבד</a:t>
+              <a:t>ניהול מקורות — חיבור מאגרי מידע פרטיים</a:t>
             </a:r>
             <a:endParaRPr lang="en-US" sz="1000" dirty="0"/>
           </a:p>
@@ -13230,7 +13596,7 @@
                 <a:ea typeface="Arial" pitchFamily="34" charset="-122"/>
                 <a:cs typeface="Arial" pitchFamily="34" charset="-120"/>
               </a:rPr>
-              <a:t>אבטחה</a:t>
+              <a:t>ניהול</a:t>
             </a:r>
             <a:endParaRPr lang="en-US" sz="1100" dirty="0"/>
           </a:p>
@@ -13269,7 +13635,7 @@
                 <a:ea typeface="Arial" pitchFamily="34" charset="-122"/>
                 <a:cs typeface="Arial" pitchFamily="34" charset="-120"/>
               </a:rPr>
-              <a:t>עקרונות שנבנו לתוך המערכת</a:t>
+              <a:t>משתמשים והרשאות</a:t>
             </a:r>
             <a:endParaRPr lang="en-US" sz="2800" dirty="0"/>
           </a:p>
@@ -13277,66 +13643,14 @@
       </p:sp>
       <p:sp>
         <p:nvSpPr>
-          <p:cNvPr id="5" name="Shape 3"/>
-          <p:cNvSpPr/>
-          <p:nvPr/>
-        </p:nvSpPr>
-        <p:spPr>
-          <a:xfrm>
-            <a:off x="6210148" y="1737360"/>
-            <a:ext cx="5432908" cy="960120"/>
-          </a:xfrm>
-          <a:prstGeom prst="roundRect">
-            <a:avLst>
-              <a:gd name="adj" fmla="val 6667"/>
-            </a:avLst>
-          </a:prstGeom>
-          <a:solidFill>
-            <a:srgbClr val="FFFFFF"/>
-          </a:solidFill>
-          <a:ln w="12700">
-            <a:solidFill>
-              <a:srgbClr val="DDE3EC"/>
-            </a:solidFill>
-            <a:prstDash val="solid"/>
-          </a:ln>
-        </p:spPr>
-      </p:sp>
-      <p:sp>
-        <p:nvSpPr>
-          <p:cNvPr id="6" name="Shape 4"/>
-          <p:cNvSpPr/>
-          <p:nvPr/>
-        </p:nvSpPr>
-        <p:spPr>
-          <a:xfrm>
-            <a:off x="11368735" y="2162556"/>
-            <a:ext cx="109728" cy="109728"/>
-          </a:xfrm>
-          <a:prstGeom prst="ellipse">
-            <a:avLst/>
-          </a:prstGeom>
-          <a:solidFill>
-            <a:srgbClr val="2A5298"/>
-          </a:solidFill>
-          <a:ln w="12700">
-            <a:solidFill>
-              <a:srgbClr val="2A5298"/>
-            </a:solidFill>
-            <a:prstDash val="solid"/>
-          </a:ln>
-        </p:spPr>
-      </p:sp>
-      <p:sp>
-        <p:nvSpPr>
-          <p:cNvPr id="7" name="Text 5"/>
+          <p:cNvPr id="5" name="Text 3"/>
           <p:cNvSpPr txBox="1"/>
           <p:nvPr/>
         </p:nvSpPr>
         <p:spPr>
           <a:xfrm>
-            <a:off x="6411316" y="1792224"/>
-            <a:ext cx="4774540" cy="850392"/>
+            <a:off x="7711135" y="1737360"/>
+            <a:ext cx="3931920" cy="4480560"/>
           </a:xfrm>
           <a:prstGeom prst="rect">
             <a:avLst/>
@@ -13345,472 +13659,173 @@
           <a:ln/>
         </p:spPr>
         <p:txBody>
-          <a:bodyPr wrap="square" lIns="0" tIns="0" rIns="0" bIns="0" rtlCol="0" anchor="ctr"/>
-          <a:lstStyle/>
-          <a:p>
-            <a:pPr rtl="1" algn="r" indent="0" marL="0">
-              <a:lnSpc>
-                <a:spcPts val="1600"/>
-              </a:lnSpc>
-              <a:buNone/>
-            </a:pPr>
-            <a:r>
-              <a:rPr lang="en-US" sz="1200" dirty="0">
-                <a:solidFill>
-                  <a:srgbClr val="3A4759"/>
-                </a:solidFill>
-                <a:latin typeface="Arial" pitchFamily="34" charset="0"/>
-                <a:ea typeface="Arial" pitchFamily="34" charset="-122"/>
-                <a:cs typeface="Arial" pitchFamily="34" charset="-120"/>
-              </a:rPr>
-              <a:t>מפתחות API לעולם אינם בצד הלקוח — כל קריאה למודל או לחיפוש עוברת דרך שרת מאובטח</a:t>
-            </a:r>
-            <a:endParaRPr lang="en-US" sz="1200" dirty="0"/>
-          </a:p>
-        </p:txBody>
-      </p:sp>
-      <p:sp>
-        <p:nvSpPr>
-          <p:cNvPr id="8" name="Shape 6"/>
-          <p:cNvSpPr/>
-          <p:nvPr/>
-        </p:nvSpPr>
-        <p:spPr>
-          <a:xfrm>
-            <a:off x="6210148" y="2843784"/>
-            <a:ext cx="5432908" cy="960120"/>
-          </a:xfrm>
-          <a:prstGeom prst="roundRect">
-            <a:avLst>
-              <a:gd name="adj" fmla="val 6667"/>
-            </a:avLst>
-          </a:prstGeom>
-          <a:solidFill>
-            <a:srgbClr val="FFFFFF"/>
-          </a:solidFill>
-          <a:ln w="12700">
-            <a:solidFill>
-              <a:srgbClr val="DDE3EC"/>
-            </a:solidFill>
-            <a:prstDash val="solid"/>
-          </a:ln>
-        </p:spPr>
-      </p:sp>
-      <p:sp>
-        <p:nvSpPr>
-          <p:cNvPr id="9" name="Shape 7"/>
-          <p:cNvSpPr/>
-          <p:nvPr/>
-        </p:nvSpPr>
-        <p:spPr>
-          <a:xfrm>
-            <a:off x="11368735" y="3268980"/>
-            <a:ext cx="109728" cy="109728"/>
-          </a:xfrm>
-          <a:prstGeom prst="ellipse">
-            <a:avLst/>
-          </a:prstGeom>
-          <a:solidFill>
-            <a:srgbClr val="2A5298"/>
-          </a:solidFill>
-          <a:ln w="12700">
-            <a:solidFill>
-              <a:srgbClr val="2A5298"/>
-            </a:solidFill>
-            <a:prstDash val="solid"/>
-          </a:ln>
-        </p:spPr>
-      </p:sp>
-      <p:sp>
-        <p:nvSpPr>
-          <p:cNvPr id="10" name="Text 8"/>
-          <p:cNvSpPr txBox="1"/>
-          <p:nvPr/>
-        </p:nvSpPr>
-        <p:spPr>
-          <a:xfrm>
-            <a:off x="6411316" y="2898648"/>
-            <a:ext cx="4774540" cy="850392"/>
-          </a:xfrm>
-          <a:prstGeom prst="rect">
-            <a:avLst/>
-          </a:prstGeom>
-          <a:noFill/>
-          <a:ln/>
-        </p:spPr>
-        <p:txBody>
-          <a:bodyPr wrap="square" lIns="0" tIns="0" rIns="0" bIns="0" rtlCol="0" anchor="ctr"/>
-          <a:lstStyle/>
-          <a:p>
-            <a:pPr rtl="1" algn="r" indent="0" marL="0">
-              <a:lnSpc>
-                <a:spcPts val="1600"/>
-              </a:lnSpc>
-              <a:buNone/>
-            </a:pPr>
-            <a:r>
-              <a:rPr lang="en-US" sz="1200" dirty="0">
-                <a:solidFill>
-                  <a:srgbClr val="3A4759"/>
-                </a:solidFill>
-                <a:latin typeface="Arial" pitchFamily="34" charset="0"/>
-                <a:ea typeface="Arial" pitchFamily="34" charset="-122"/>
-                <a:cs typeface="Arial" pitchFamily="34" charset="-120"/>
-              </a:rPr>
-              <a:t>כל נקודות הקצה מוגנות באימות; טוקן שפג תוקפו מחזיר את המשתמש למסך הכניסה</a:t>
-            </a:r>
-            <a:endParaRPr lang="en-US" sz="1200" dirty="0"/>
-          </a:p>
-        </p:txBody>
-      </p:sp>
-      <p:sp>
-        <p:nvSpPr>
-          <p:cNvPr id="11" name="Shape 9"/>
-          <p:cNvSpPr/>
-          <p:nvPr/>
-        </p:nvSpPr>
-        <p:spPr>
-          <a:xfrm>
-            <a:off x="6210148" y="3950208"/>
-            <a:ext cx="5432908" cy="960120"/>
-          </a:xfrm>
-          <a:prstGeom prst="roundRect">
-            <a:avLst>
-              <a:gd name="adj" fmla="val 6667"/>
-            </a:avLst>
-          </a:prstGeom>
-          <a:solidFill>
-            <a:srgbClr val="FFFFFF"/>
-          </a:solidFill>
-          <a:ln w="12700">
-            <a:solidFill>
-              <a:srgbClr val="DDE3EC"/>
-            </a:solidFill>
-            <a:prstDash val="solid"/>
-          </a:ln>
-        </p:spPr>
-      </p:sp>
-      <p:sp>
-        <p:nvSpPr>
-          <p:cNvPr id="12" name="Shape 10"/>
-          <p:cNvSpPr/>
-          <p:nvPr/>
-        </p:nvSpPr>
-        <p:spPr>
-          <a:xfrm>
-            <a:off x="11368735" y="4375404"/>
-            <a:ext cx="109728" cy="109728"/>
-          </a:xfrm>
-          <a:prstGeom prst="ellipse">
-            <a:avLst/>
-          </a:prstGeom>
-          <a:solidFill>
-            <a:srgbClr val="2A5298"/>
-          </a:solidFill>
-          <a:ln w="12700">
-            <a:solidFill>
-              <a:srgbClr val="2A5298"/>
-            </a:solidFill>
-            <a:prstDash val="solid"/>
-          </a:ln>
-        </p:spPr>
-      </p:sp>
-      <p:sp>
-        <p:nvSpPr>
-          <p:cNvPr id="13" name="Text 11"/>
-          <p:cNvSpPr txBox="1"/>
-          <p:nvPr/>
-        </p:nvSpPr>
-        <p:spPr>
-          <a:xfrm>
-            <a:off x="6411316" y="4005072"/>
-            <a:ext cx="4774540" cy="850392"/>
-          </a:xfrm>
-          <a:prstGeom prst="rect">
-            <a:avLst/>
-          </a:prstGeom>
-          <a:noFill/>
-          <a:ln/>
-        </p:spPr>
-        <p:txBody>
-          <a:bodyPr wrap="square" lIns="0" tIns="0" rIns="0" bIns="0" rtlCol="0" anchor="ctr"/>
-          <a:lstStyle/>
-          <a:p>
-            <a:pPr rtl="1" algn="r" indent="0" marL="0">
-              <a:lnSpc>
-                <a:spcPts val="1600"/>
-              </a:lnSpc>
-              <a:buNone/>
-            </a:pPr>
-            <a:r>
-              <a:rPr lang="en-US" sz="1200" dirty="0">
-                <a:solidFill>
-                  <a:srgbClr val="3A4759"/>
-                </a:solidFill>
-                <a:latin typeface="Arial" pitchFamily="34" charset="0"/>
-                <a:ea typeface="Arial" pitchFamily="34" charset="-122"/>
-                <a:cs typeface="Arial" pitchFamily="34" charset="-120"/>
-              </a:rPr>
-              <a:t>מסמכי הערכה אינם נשמרים בענן ללא הצפנה, ותוכן גולמי אינו נכתב ללוגים</a:t>
-            </a:r>
-            <a:endParaRPr lang="en-US" sz="1200" dirty="0"/>
-          </a:p>
-        </p:txBody>
-      </p:sp>
-      <p:sp>
-        <p:nvSpPr>
-          <p:cNvPr id="14" name="Shape 12"/>
-          <p:cNvSpPr/>
-          <p:nvPr/>
-        </p:nvSpPr>
-        <p:spPr>
-          <a:xfrm>
-            <a:off x="548640" y="1737360"/>
-            <a:ext cx="5432908" cy="960120"/>
-          </a:xfrm>
-          <a:prstGeom prst="roundRect">
-            <a:avLst>
-              <a:gd name="adj" fmla="val 6667"/>
-            </a:avLst>
-          </a:prstGeom>
-          <a:solidFill>
-            <a:srgbClr val="FFFFFF"/>
-          </a:solidFill>
-          <a:ln w="12700">
-            <a:solidFill>
-              <a:srgbClr val="DDE3EC"/>
-            </a:solidFill>
-            <a:prstDash val="solid"/>
-          </a:ln>
-        </p:spPr>
-      </p:sp>
-      <p:sp>
-        <p:nvSpPr>
-          <p:cNvPr id="15" name="Shape 13"/>
-          <p:cNvSpPr/>
-          <p:nvPr/>
-        </p:nvSpPr>
-        <p:spPr>
-          <a:xfrm>
-            <a:off x="5707228" y="2162556"/>
-            <a:ext cx="109728" cy="109728"/>
-          </a:xfrm>
-          <a:prstGeom prst="ellipse">
-            <a:avLst/>
-          </a:prstGeom>
-          <a:solidFill>
-            <a:srgbClr val="2A5298"/>
-          </a:solidFill>
-          <a:ln w="12700">
-            <a:solidFill>
-              <a:srgbClr val="2A5298"/>
-            </a:solidFill>
-            <a:prstDash val="solid"/>
-          </a:ln>
-        </p:spPr>
-      </p:sp>
-      <p:sp>
-        <p:nvSpPr>
-          <p:cNvPr id="16" name="Text 14"/>
-          <p:cNvSpPr txBox="1"/>
-          <p:nvPr/>
-        </p:nvSpPr>
-        <p:spPr>
-          <a:xfrm>
-            <a:off x="749808" y="1792224"/>
-            <a:ext cx="4774540" cy="850392"/>
-          </a:xfrm>
-          <a:prstGeom prst="rect">
-            <a:avLst/>
-          </a:prstGeom>
-          <a:noFill/>
-          <a:ln/>
-        </p:spPr>
-        <p:txBody>
-          <a:bodyPr wrap="square" lIns="0" tIns="0" rIns="0" bIns="0" rtlCol="0" anchor="ctr"/>
-          <a:lstStyle/>
-          <a:p>
-            <a:pPr rtl="1" algn="r" indent="0" marL="0">
-              <a:lnSpc>
-                <a:spcPts val="1600"/>
-              </a:lnSpc>
-              <a:buNone/>
-            </a:pPr>
-            <a:r>
-              <a:rPr lang="en-US" sz="1200" dirty="0">
-                <a:solidFill>
-                  <a:srgbClr val="3A4759"/>
-                </a:solidFill>
-                <a:latin typeface="Arial" pitchFamily="34" charset="0"/>
-                <a:ea typeface="Arial" pitchFamily="34" charset="-122"/>
-                <a:cs typeface="Arial" pitchFamily="34" charset="-120"/>
-              </a:rPr>
-              <a:t>פרטי הזדהות של מקורות חיצוניים מוסתרים בממשק ונשמרים בצד השרת בלבד</a:t>
-            </a:r>
-            <a:endParaRPr lang="en-US" sz="1200" dirty="0"/>
-          </a:p>
-        </p:txBody>
-      </p:sp>
-      <p:sp>
-        <p:nvSpPr>
-          <p:cNvPr id="17" name="Shape 15"/>
-          <p:cNvSpPr/>
-          <p:nvPr/>
-        </p:nvSpPr>
-        <p:spPr>
-          <a:xfrm>
-            <a:off x="548640" y="2843784"/>
-            <a:ext cx="5432908" cy="960120"/>
-          </a:xfrm>
-          <a:prstGeom prst="roundRect">
-            <a:avLst>
-              <a:gd name="adj" fmla="val 6667"/>
-            </a:avLst>
-          </a:prstGeom>
-          <a:solidFill>
-            <a:srgbClr val="FFFFFF"/>
-          </a:solidFill>
-          <a:ln w="12700">
-            <a:solidFill>
-              <a:srgbClr val="DDE3EC"/>
-            </a:solidFill>
-            <a:prstDash val="solid"/>
-          </a:ln>
-        </p:spPr>
-      </p:sp>
-      <p:sp>
-        <p:nvSpPr>
-          <p:cNvPr id="18" name="Shape 16"/>
-          <p:cNvSpPr/>
-          <p:nvPr/>
-        </p:nvSpPr>
-        <p:spPr>
-          <a:xfrm>
-            <a:off x="5707228" y="3268980"/>
-            <a:ext cx="109728" cy="109728"/>
-          </a:xfrm>
-          <a:prstGeom prst="ellipse">
-            <a:avLst/>
-          </a:prstGeom>
-          <a:solidFill>
-            <a:srgbClr val="2A5298"/>
-          </a:solidFill>
-          <a:ln w="12700">
-            <a:solidFill>
-              <a:srgbClr val="2A5298"/>
-            </a:solidFill>
-            <a:prstDash val="solid"/>
-          </a:ln>
-        </p:spPr>
-      </p:sp>
-      <p:sp>
-        <p:nvSpPr>
-          <p:cNvPr id="19" name="Text 17"/>
-          <p:cNvSpPr txBox="1"/>
-          <p:nvPr/>
-        </p:nvSpPr>
-        <p:spPr>
-          <a:xfrm>
-            <a:off x="749808" y="2898648"/>
-            <a:ext cx="4774540" cy="850392"/>
-          </a:xfrm>
-          <a:prstGeom prst="rect">
-            <a:avLst/>
-          </a:prstGeom>
-          <a:noFill/>
-          <a:ln/>
-        </p:spPr>
-        <p:txBody>
-          <a:bodyPr wrap="square" lIns="0" tIns="0" rIns="0" bIns="0" rtlCol="0" anchor="ctr"/>
-          <a:lstStyle/>
-          <a:p>
-            <a:pPr rtl="1" algn="r" indent="0" marL="0">
-              <a:lnSpc>
-                <a:spcPts val="1600"/>
-              </a:lnSpc>
-              <a:buNone/>
-            </a:pPr>
-            <a:r>
-              <a:rPr lang="en-US" sz="1200" dirty="0">
-                <a:solidFill>
-                  <a:srgbClr val="3A4759"/>
-                </a:solidFill>
-                <a:latin typeface="Arial" pitchFamily="34" charset="0"/>
-                <a:ea typeface="Arial" pitchFamily="34" charset="-122"/>
-                <a:cs typeface="Arial" pitchFamily="34" charset="-120"/>
-              </a:rPr>
-              <a:t>המערכת תוכננה לזרימות עבודה של מודיעין גלוי (OSINT); עבודה מסווגת היא שלב עתידי</a:t>
-            </a:r>
-            <a:endParaRPr lang="en-US" sz="1200" dirty="0"/>
-          </a:p>
-        </p:txBody>
-      </p:sp>
-      <p:sp>
-        <p:nvSpPr>
-          <p:cNvPr id="20" name="Shape 18"/>
-          <p:cNvSpPr/>
-          <p:nvPr/>
-        </p:nvSpPr>
-        <p:spPr>
-          <a:xfrm>
-            <a:off x="548640" y="5166360"/>
-            <a:ext cx="11094415" cy="1097280"/>
-          </a:xfrm>
-          <a:prstGeom prst="roundRect">
-            <a:avLst>
-              <a:gd name="adj" fmla="val 5833"/>
-            </a:avLst>
-          </a:prstGeom>
-          <a:solidFill>
-            <a:srgbClr val="E9EDF5"/>
-          </a:solidFill>
-          <a:ln w="12700">
-            <a:solidFill>
-              <a:srgbClr val="E9EDF5"/>
-            </a:solidFill>
-            <a:prstDash val="solid"/>
-          </a:ln>
-        </p:spPr>
-      </p:sp>
-      <p:sp>
-        <p:nvSpPr>
-          <p:cNvPr id="21" name="Text 19"/>
-          <p:cNvSpPr txBox="1"/>
-          <p:nvPr/>
-        </p:nvSpPr>
-        <p:spPr>
-          <a:xfrm>
-            <a:off x="777240" y="5166360"/>
-            <a:ext cx="10637215" cy="1097280"/>
-          </a:xfrm>
-          <a:prstGeom prst="rect">
-            <a:avLst/>
-          </a:prstGeom>
-          <a:noFill/>
-          <a:ln/>
-        </p:spPr>
-        <p:txBody>
-          <a:bodyPr wrap="square" lIns="0" tIns="0" rIns="0" bIns="0" rtlCol="0" anchor="ctr"/>
-          <a:lstStyle/>
-          <a:p>
-            <a:pPr rtl="1" algn="r" indent="0" marL="0">
+          <a:bodyPr wrap="square" lIns="0" tIns="0" rIns="0" bIns="0" rtlCol="0" anchor="t"/>
+          <a:lstStyle/>
+          <a:p>
+            <a:pPr algn="r" marL="342900" indent="-342900">
               <a:lnSpc>
                 <a:spcPts val="1700"/>
               </a:lnSpc>
+              <a:spcAft>
+                <a:spcPts val="900"/>
+              </a:spcAft>
+              <a:buSzPct val="100000"/>
+              <a:buChar char="•"/>
+            </a:pPr>
+            <a:r>
+              <a:rPr lang="en-US" sz="1200" dirty="0">
+                <a:solidFill>
+                  <a:srgbClr val="3A4759"/>
+                </a:solidFill>
+                <a:latin typeface="Arial" pitchFamily="34" charset="0"/>
+                <a:ea typeface="Arial" pitchFamily="34" charset="-122"/>
+                <a:cs typeface="Arial" pitchFamily="34" charset="-120"/>
+              </a:rPr>
+              <a:t>שני תפקידים: מנהל מערכת ואנליסט</a:t>
+            </a:r>
+            <a:endParaRPr lang="en-US" sz="1200" dirty="0"/>
+          </a:p>
+          <a:p>
+            <a:pPr algn="r" marL="342900" indent="-342900">
+              <a:lnSpc>
+                <a:spcPts val="1700"/>
+              </a:lnSpc>
+              <a:spcAft>
+                <a:spcPts val="900"/>
+              </a:spcAft>
+              <a:buSzPct val="100000"/>
+              <a:buChar char="•"/>
+            </a:pPr>
+            <a:r>
+              <a:rPr lang="en-US" sz="1200" dirty="0">
+                <a:solidFill>
+                  <a:srgbClr val="3A4759"/>
+                </a:solidFill>
+                <a:latin typeface="Arial" pitchFamily="34" charset="0"/>
+                <a:ea typeface="Arial" pitchFamily="34" charset="-122"/>
+                <a:cs typeface="Arial" pitchFamily="34" charset="-120"/>
+              </a:rPr>
+              <a:t>יצירת משתמשים, איפוס סיסמאות והסרה — למנהל בלבד</a:t>
+            </a:r>
+            <a:endParaRPr lang="en-US" sz="1200" dirty="0"/>
+          </a:p>
+          <a:p>
+            <a:pPr algn="r" marL="342900" indent="-342900">
+              <a:lnSpc>
+                <a:spcPts val="1700"/>
+              </a:lnSpc>
+              <a:spcAft>
+                <a:spcPts val="900"/>
+              </a:spcAft>
+              <a:buSzPct val="100000"/>
+              <a:buChar char="•"/>
+            </a:pPr>
+            <a:r>
+              <a:rPr lang="en-US" sz="1200" dirty="0">
+                <a:solidFill>
+                  <a:srgbClr val="3A4759"/>
+                </a:solidFill>
+                <a:latin typeface="Arial" pitchFamily="34" charset="0"/>
+                <a:ea typeface="Arial" pitchFamily="34" charset="-122"/>
+                <a:cs typeface="Arial" pitchFamily="34" charset="-120"/>
+              </a:rPr>
+              <a:t>סיסמאות נשמרות כ-hash בלבד (bcrypt) ולעולם לא כטקסט גלוי</a:t>
+            </a:r>
+            <a:endParaRPr lang="en-US" sz="1200" dirty="0"/>
+          </a:p>
+          <a:p>
+            <a:pPr algn="r" marL="342900" indent="-342900">
+              <a:lnSpc>
+                <a:spcPts val="1700"/>
+              </a:lnSpc>
+              <a:spcAft>
+                <a:spcPts val="900"/>
+              </a:spcAft>
+              <a:buSzPct val="100000"/>
+              <a:buChar char="•"/>
+            </a:pPr>
+            <a:r>
+              <a:rPr lang="en-US" sz="1200" dirty="0">
+                <a:solidFill>
+                  <a:srgbClr val="3A4759"/>
+                </a:solidFill>
+                <a:latin typeface="Arial" pitchFamily="34" charset="0"/>
+                <a:ea typeface="Arial" pitchFamily="34" charset="-122"/>
+                <a:cs typeface="Arial" pitchFamily="34" charset="-120"/>
+              </a:rPr>
+              <a:t>מסך ניהול המשתמשים אינו מוצג כלל למי שאינו מנהל</a:t>
+            </a:r>
+            <a:endParaRPr lang="en-US" sz="1200" dirty="0"/>
+          </a:p>
+        </p:txBody>
+      </p:sp>
+      <p:pic>
+        <p:nvPicPr>
+          <p:cNvPr id="6" name="Image 0" descr="/home/user/flightzone/docs/avar-guide/assets/32-users.jpg">    </p:cNvPr>
+          <p:cNvPicPr>
+            <a:picLocks noChangeAspect="1"/>
+          </p:cNvPicPr>
+          <p:nvPr/>
+        </p:nvPicPr>
+        <p:blipFill>
+          <a:blip r:embed="rId1"/>
+          <a:stretch>
+            <a:fillRect/>
+          </a:stretch>
+        </p:blipFill>
+        <p:spPr>
+          <a:xfrm>
+            <a:off x="595732" y="1737360"/>
+            <a:ext cx="6656832" cy="4160520"/>
+          </a:xfrm>
+          <a:prstGeom prst="rect">
+            <a:avLst/>
+          </a:prstGeom>
+          <a:effectLst>
+            <a:outerShdw sx="100000" sy="100000" kx="0" ky="0" algn="bl" rotWithShape="0" blurRad="177800" dist="50800" dir="5400000">
+              <a:srgbClr val="0F2447">
+                <a:alpha val="22000"/>
+              </a:srgbClr>
+            </a:outerShdw>
+          </a:effectLst>
+        </p:spPr>
+      </p:pic>
+      <p:sp>
+        <p:nvSpPr>
+          <p:cNvPr id="7" name="Text 4"/>
+          <p:cNvSpPr txBox="1"/>
+          <p:nvPr/>
+        </p:nvSpPr>
+        <p:spPr>
+          <a:xfrm>
+            <a:off x="548640" y="6007608"/>
+            <a:ext cx="6751015" cy="292608"/>
+          </a:xfrm>
+          <a:prstGeom prst="rect">
+            <a:avLst/>
+          </a:prstGeom>
+          <a:noFill/>
+          <a:ln/>
+        </p:spPr>
+        <p:txBody>
+          <a:bodyPr wrap="square" lIns="0" tIns="0" rIns="0" bIns="0" rtlCol="0" anchor="ctr"/>
+          <a:lstStyle/>
+          <a:p>
+            <a:pPr rtl="1" algn="ctr" indent="0" marL="0">
               <a:buNone/>
             </a:pPr>
             <a:r>
-              <a:rPr lang="en-US" sz="1200" b="1" dirty="0">
-                <a:solidFill>
-                  <a:srgbClr val="0F2447"/>
-                </a:solidFill>
-                <a:latin typeface="Arial" pitchFamily="34" charset="0"/>
-                <a:ea typeface="Arial" pitchFamily="34" charset="-122"/>
-                <a:cs typeface="Arial" pitchFamily="34" charset="-120"/>
-              </a:rPr>
-              <a:t>ארכיטקטורת האבטחה של AVAR נגזרת מהנחת יסוד אחת: המסמכים שהמערכת מקבלת הם הנכס הרגיש ביותר בה. מכאן נגזרות ההגבלות — אין מפתחות בצד לקוח, אין תוכן גולמי בלוגים, ואין אחסון לא מוצפן.</a:t>
-            </a:r>
-            <a:endParaRPr lang="en-US" sz="1200" dirty="0"/>
+              <a:rPr lang="en-US" sz="1000" dirty="0">
+                <a:solidFill>
+                  <a:srgbClr val="7B8798"/>
+                </a:solidFill>
+                <a:latin typeface="Arial" pitchFamily="34" charset="0"/>
+                <a:ea typeface="Arial" pitchFamily="34" charset="-122"/>
+                <a:cs typeface="Arial" pitchFamily="34" charset="-120"/>
+              </a:rPr>
+              <a:t>ניהול משתמשים — למנהל מערכת בלבד</a:t>
+            </a:r>
+            <a:endParaRPr lang="en-US" sz="1000" dirty="0"/>
           </a:p>
         </p:txBody>
       </p:sp>
@@ -13906,7 +13921,7 @@
                 <a:ea typeface="Arial" pitchFamily="34" charset="-122"/>
                 <a:cs typeface="Arial" pitchFamily="34" charset="-120"/>
               </a:rPr>
-              <a:t>סיכום</a:t>
+              <a:t>אבטחה</a:t>
             </a:r>
             <a:endParaRPr lang="en-US" sz="1100" dirty="0"/>
           </a:p>
@@ -13945,7 +13960,7 @@
                 <a:ea typeface="Arial" pitchFamily="34" charset="-122"/>
                 <a:cs typeface="Arial" pitchFamily="34" charset="-120"/>
               </a:rPr>
-              <a:t>מה המערכת נותנת לאנליסט</a:t>
+              <a:t>עקרונות שנבנו לתוך המערכת</a:t>
             </a:r>
             <a:endParaRPr lang="en-US" sz="2800" dirty="0"/>
           </a:p>
@@ -14039,7 +14054,7 @@
                 <a:ea typeface="Arial" pitchFamily="34" charset="-122"/>
                 <a:cs typeface="Arial" pitchFamily="34" charset="-120"/>
               </a:rPr>
-              <a:t>סקירת עמיתים שיטתית על כל הערכה — בלי להמתין לזמינות של אדם</a:t>
+              <a:t>מפתחות API לעולם אינם בצד הלקוח — כל קריאה למודל או לחיפוש עוברת דרך שרת מאובטח</a:t>
             </a:r>
             <a:endParaRPr lang="en-US" sz="1200" dirty="0"/>
           </a:p>
@@ -14133,7 +14148,7 @@
                 <a:ea typeface="Arial" pitchFamily="34" charset="-122"/>
                 <a:cs typeface="Arial" pitchFamily="34" charset="-120"/>
               </a:rPr>
-              <a:t>חשיפת ההנחות הסמויות שנושאות את ההערכה ואיש לא ניסח</a:t>
+              <a:t>כל נקודות הקצה מוגנות באימות; טוקן שפג תוקפו מחזיר את המשתמש למסך הכניסה</a:t>
             </a:r>
             <a:endParaRPr lang="en-US" sz="1200" dirty="0"/>
           </a:p>
@@ -14227,7 +14242,7 @@
                 <a:ea typeface="Arial" pitchFamily="34" charset="-122"/>
                 <a:cs typeface="Arial" pitchFamily="34" charset="-120"/>
               </a:rPr>
-              <a:t>עדויות סותרות מהשטח, בשלוש שפות, עם מקור ודירוג אמינות</a:t>
+              <a:t>מסמכי הערכה אינם נשמרים בענן ללא הצפנה, ותוכן גולמי אינו נכתב ללוגים</a:t>
             </a:r>
             <a:endParaRPr lang="en-US" sz="1200" dirty="0"/>
           </a:p>
@@ -14321,7 +14336,7 @@
                 <a:ea typeface="Arial" pitchFamily="34" charset="-122"/>
                 <a:cs typeface="Arial" pitchFamily="34" charset="-120"/>
               </a:rPr>
-              <a:t>חלופות מדורגות בשני ממדים במקום תרחיש יחיד</a:t>
+              <a:t>פרטי הזדהות של מקורות חיצוניים מוסתרים בממשק ונשמרים בצד השרת בלבד</a:t>
             </a:r>
             <a:endParaRPr lang="en-US" sz="1200" dirty="0"/>
           </a:p>
@@ -14415,7 +14430,7 @@
                 <a:ea typeface="Arial" pitchFamily="34" charset="-122"/>
                 <a:cs typeface="Arial" pitchFamily="34" charset="-120"/>
               </a:rPr>
-              <a:t>שקיפות מלאה — כל סוכן, כל חיפוש וכל עלות חשופים לבדיקה</a:t>
+              <a:t>המערכת תוכננה לזרימות עבודה של מודיעין גלוי (OSINT); עבודה מסווגת היא שלב עתידי</a:t>
             </a:r>
             <a:endParaRPr lang="en-US" sz="1200" dirty="0"/>
           </a:p>
@@ -14429,106 +14444,12 @@
         </p:nvSpPr>
         <p:spPr>
           <a:xfrm>
-            <a:off x="548640" y="3950208"/>
-            <a:ext cx="5432908" cy="960120"/>
+            <a:off x="548640" y="5166360"/>
+            <a:ext cx="11094415" cy="758952"/>
           </a:xfrm>
           <a:prstGeom prst="roundRect">
             <a:avLst>
-              <a:gd name="adj" fmla="val 6667"/>
-            </a:avLst>
-          </a:prstGeom>
-          <a:solidFill>
-            <a:srgbClr val="FFFFFF"/>
-          </a:solidFill>
-          <a:ln w="12700">
-            <a:solidFill>
-              <a:srgbClr val="DDE3EC"/>
-            </a:solidFill>
-            <a:prstDash val="solid"/>
-          </a:ln>
-        </p:spPr>
-      </p:sp>
-      <p:sp>
-        <p:nvSpPr>
-          <p:cNvPr id="21" name="Shape 19"/>
-          <p:cNvSpPr/>
-          <p:nvPr/>
-        </p:nvSpPr>
-        <p:spPr>
-          <a:xfrm>
-            <a:off x="5707228" y="4375404"/>
-            <a:ext cx="109728" cy="109728"/>
-          </a:xfrm>
-          <a:prstGeom prst="ellipse">
-            <a:avLst/>
-          </a:prstGeom>
-          <a:solidFill>
-            <a:srgbClr val="2A5298"/>
-          </a:solidFill>
-          <a:ln w="12700">
-            <a:solidFill>
-              <a:srgbClr val="2A5298"/>
-            </a:solidFill>
-            <a:prstDash val="solid"/>
-          </a:ln>
-        </p:spPr>
-      </p:sp>
-      <p:sp>
-        <p:nvSpPr>
-          <p:cNvPr id="22" name="Text 20"/>
-          <p:cNvSpPr txBox="1"/>
-          <p:nvPr/>
-        </p:nvSpPr>
-        <p:spPr>
-          <a:xfrm>
-            <a:off x="749808" y="4005072"/>
-            <a:ext cx="4774540" cy="850392"/>
-          </a:xfrm>
-          <a:prstGeom prst="rect">
-            <a:avLst/>
-          </a:prstGeom>
-          <a:noFill/>
-          <a:ln/>
-        </p:spPr>
-        <p:txBody>
-          <a:bodyPr wrap="square" lIns="0" tIns="0" rIns="0" bIns="0" rtlCol="0" anchor="ctr"/>
-          <a:lstStyle/>
-          <a:p>
-            <a:pPr rtl="1" algn="r" indent="0" marL="0">
-              <a:lnSpc>
-                <a:spcPts val="1600"/>
-              </a:lnSpc>
-              <a:buNone/>
-            </a:pPr>
-            <a:r>
-              <a:rPr lang="en-US" sz="1200" dirty="0">
-                <a:solidFill>
-                  <a:srgbClr val="3A4759"/>
-                </a:solidFill>
-                <a:latin typeface="Arial" pitchFamily="34" charset="0"/>
-                <a:ea typeface="Arial" pitchFamily="34" charset="-122"/>
-                <a:cs typeface="Arial" pitchFamily="34" charset="-120"/>
-              </a:rPr>
-              <a:t>מנוע פתוח להרחבה: הצוות מגדיל את הידע של המערכת בעצמו, בלי מפתח</a:t>
-            </a:r>
-            <a:endParaRPr lang="en-US" sz="1200" dirty="0"/>
-          </a:p>
-        </p:txBody>
-      </p:sp>
-      <p:sp>
-        <p:nvSpPr>
-          <p:cNvPr id="23" name="Shape 21"/>
-          <p:cNvSpPr/>
-          <p:nvPr/>
-        </p:nvSpPr>
-        <p:spPr>
-          <a:xfrm>
-            <a:off x="548640" y="5166360"/>
-            <a:ext cx="11094415" cy="1097280"/>
-          </a:xfrm>
-          <a:prstGeom prst="roundRect">
-            <a:avLst>
-              <a:gd name="adj" fmla="val 5833"/>
+              <a:gd name="adj" fmla="val 8434"/>
             </a:avLst>
           </a:prstGeom>
           <a:solidFill>
@@ -14544,14 +14465,14 @@
       </p:sp>
       <p:sp>
         <p:nvSpPr>
-          <p:cNvPr id="24" name="Text 22"/>
+          <p:cNvPr id="21" name="Text 19"/>
           <p:cNvSpPr txBox="1"/>
           <p:nvPr/>
         </p:nvSpPr>
         <p:spPr>
           <a:xfrm>
             <a:off x="777240" y="5166360"/>
-            <a:ext cx="10637215" cy="1097280"/>
+            <a:ext cx="10637215" cy="758952"/>
           </a:xfrm>
           <a:prstGeom prst="rect">
             <a:avLst/>
@@ -14578,7 +14499,7 @@
                 <a:ea typeface="Arial" pitchFamily="34" charset="-122"/>
                 <a:cs typeface="Arial" pitchFamily="34" charset="-120"/>
               </a:rPr>
-              <a:t>AVAR אינה מחליפה את האנליסט. היא מוודאת שאף הערכה לא תצא מהדלת בלי שמישהו — או משהו — ניסה להפריך אותה קודם.</a:t>
+              <a:t>ארכיטקטורת האבטחה של AVAR נגזרת מהנחת יסוד אחת: המסמכים שהמערכת מקבלת הם הנכס הרגיש ביותר בה. מכאן נגזרות ההגבלות — אין מפתחות בצד לקוח, אין תוכן גולמי בלוגים, ואין אחסון לא מוצפן.</a:t>
             </a:r>
             <a:endParaRPr lang="en-US" sz="1200" dirty="0"/>
           </a:p>
@@ -14595,6 +14516,776 @@
 <file path=ppt/slides/slide35.xml><?xml version="1.0" encoding="utf-8"?>
 <p:sld xmlns:a="http://schemas.openxmlformats.org/drawingml/2006/main" xmlns:r="http://schemas.openxmlformats.org/officeDocument/2006/relationships" xmlns:p="http://schemas.openxmlformats.org/presentationml/2006/main">
   <p:cSld name="Slide 35">
+    <p:bg>
+      <p:bgPr>
+        <a:solidFill>
+          <a:srgbClr val="F4F6FA"/>
+        </a:solidFill>
+      </p:bgPr>
+    </p:bg>
+    <p:spTree>
+      <p:nvGrpSpPr>
+        <p:cNvPr id="1" name=""/>
+        <p:cNvGrpSpPr/>
+        <p:nvPr/>
+      </p:nvGrpSpPr>
+      <p:grpSpPr>
+        <a:xfrm>
+          <a:off x="0" y="0"/>
+          <a:ext cx="0" cy="0"/>
+          <a:chOff x="0" y="0"/>
+          <a:chExt cx="0" cy="0"/>
+        </a:xfrm>
+      </p:grpSpPr>
+      <p:sp>
+        <p:nvSpPr>
+          <p:cNvPr id="2" name="Shape 0"/>
+          <p:cNvSpPr/>
+          <p:nvPr/>
+        </p:nvSpPr>
+        <p:spPr>
+          <a:xfrm>
+            <a:off x="9905695" y="329184"/>
+            <a:ext cx="1737360" cy="310896"/>
+          </a:xfrm>
+          <a:prstGeom prst="roundRect">
+            <a:avLst>
+              <a:gd name="adj" fmla="val 50000"/>
+            </a:avLst>
+          </a:prstGeom>
+          <a:solidFill>
+            <a:srgbClr val="E5EBF6"/>
+          </a:solidFill>
+          <a:ln w="12700">
+            <a:solidFill>
+              <a:srgbClr val="E5EBF6"/>
+            </a:solidFill>
+            <a:prstDash val="solid"/>
+          </a:ln>
+        </p:spPr>
+      </p:sp>
+      <p:sp>
+        <p:nvSpPr>
+          <p:cNvPr id="3" name="Text 1"/>
+          <p:cNvSpPr txBox="1"/>
+          <p:nvPr/>
+        </p:nvSpPr>
+        <p:spPr>
+          <a:xfrm>
+            <a:off x="9905695" y="329184"/>
+            <a:ext cx="1737360" cy="310896"/>
+          </a:xfrm>
+          <a:prstGeom prst="rect">
+            <a:avLst/>
+          </a:prstGeom>
+          <a:noFill/>
+          <a:ln/>
+        </p:spPr>
+        <p:txBody>
+          <a:bodyPr wrap="square" lIns="0" tIns="0" rIns="0" bIns="0" rtlCol="0" anchor="ctr"/>
+          <a:lstStyle/>
+          <a:p>
+            <a:pPr rtl="1" algn="ctr" indent="0" marL="0">
+              <a:buNone/>
+            </a:pPr>
+            <a:r>
+              <a:rPr lang="en-US" sz="1100" b="1" dirty="0">
+                <a:solidFill>
+                  <a:srgbClr val="2A5298"/>
+                </a:solidFill>
+                <a:latin typeface="Arial" pitchFamily="34" charset="0"/>
+                <a:ea typeface="Arial" pitchFamily="34" charset="-122"/>
+                <a:cs typeface="Arial" pitchFamily="34" charset="-120"/>
+              </a:rPr>
+              <a:t>סיכום</a:t>
+            </a:r>
+            <a:endParaRPr lang="en-US" sz="1100" dirty="0"/>
+          </a:p>
+        </p:txBody>
+      </p:sp>
+      <p:sp>
+        <p:nvSpPr>
+          <p:cNvPr id="4" name="Text 2"/>
+          <p:cNvSpPr txBox="1"/>
+          <p:nvPr/>
+        </p:nvSpPr>
+        <p:spPr>
+          <a:xfrm>
+            <a:off x="548640" y="749808"/>
+            <a:ext cx="11094415" cy="749808"/>
+          </a:xfrm>
+          <a:prstGeom prst="rect">
+            <a:avLst/>
+          </a:prstGeom>
+          <a:noFill/>
+          <a:ln/>
+        </p:spPr>
+        <p:txBody>
+          <a:bodyPr wrap="square" lIns="0" tIns="0" rIns="0" bIns="0" rtlCol="0" anchor="ctr"/>
+          <a:lstStyle/>
+          <a:p>
+            <a:pPr rtl="1" algn="r" indent="0" marL="0">
+              <a:buNone/>
+            </a:pPr>
+            <a:r>
+              <a:rPr lang="en-US" sz="2800" b="1" dirty="0">
+                <a:solidFill>
+                  <a:srgbClr val="0F2447"/>
+                </a:solidFill>
+                <a:latin typeface="Arial" pitchFamily="34" charset="0"/>
+                <a:ea typeface="Arial" pitchFamily="34" charset="-122"/>
+                <a:cs typeface="Arial" pitchFamily="34" charset="-120"/>
+              </a:rPr>
+              <a:t>מה המערכת נותנת לאנליסט</a:t>
+            </a:r>
+            <a:endParaRPr lang="en-US" sz="2800" dirty="0"/>
+          </a:p>
+        </p:txBody>
+      </p:sp>
+      <p:sp>
+        <p:nvSpPr>
+          <p:cNvPr id="5" name="Shape 3"/>
+          <p:cNvSpPr/>
+          <p:nvPr/>
+        </p:nvSpPr>
+        <p:spPr>
+          <a:xfrm>
+            <a:off x="6210148" y="1737360"/>
+            <a:ext cx="5432908" cy="960120"/>
+          </a:xfrm>
+          <a:prstGeom prst="roundRect">
+            <a:avLst>
+              <a:gd name="adj" fmla="val 6667"/>
+            </a:avLst>
+          </a:prstGeom>
+          <a:solidFill>
+            <a:srgbClr val="FFFFFF"/>
+          </a:solidFill>
+          <a:ln w="12700">
+            <a:solidFill>
+              <a:srgbClr val="DDE3EC"/>
+            </a:solidFill>
+            <a:prstDash val="solid"/>
+          </a:ln>
+        </p:spPr>
+      </p:sp>
+      <p:sp>
+        <p:nvSpPr>
+          <p:cNvPr id="6" name="Shape 4"/>
+          <p:cNvSpPr/>
+          <p:nvPr/>
+        </p:nvSpPr>
+        <p:spPr>
+          <a:xfrm>
+            <a:off x="11368735" y="2162556"/>
+            <a:ext cx="109728" cy="109728"/>
+          </a:xfrm>
+          <a:prstGeom prst="ellipse">
+            <a:avLst/>
+          </a:prstGeom>
+          <a:solidFill>
+            <a:srgbClr val="2A5298"/>
+          </a:solidFill>
+          <a:ln w="12700">
+            <a:solidFill>
+              <a:srgbClr val="2A5298"/>
+            </a:solidFill>
+            <a:prstDash val="solid"/>
+          </a:ln>
+        </p:spPr>
+      </p:sp>
+      <p:sp>
+        <p:nvSpPr>
+          <p:cNvPr id="7" name="Text 5"/>
+          <p:cNvSpPr txBox="1"/>
+          <p:nvPr/>
+        </p:nvSpPr>
+        <p:spPr>
+          <a:xfrm>
+            <a:off x="6411316" y="1792224"/>
+            <a:ext cx="4774540" cy="850392"/>
+          </a:xfrm>
+          <a:prstGeom prst="rect">
+            <a:avLst/>
+          </a:prstGeom>
+          <a:noFill/>
+          <a:ln/>
+        </p:spPr>
+        <p:txBody>
+          <a:bodyPr wrap="square" lIns="0" tIns="0" rIns="0" bIns="0" rtlCol="0" anchor="ctr"/>
+          <a:lstStyle/>
+          <a:p>
+            <a:pPr rtl="1" algn="r" indent="0" marL="0">
+              <a:lnSpc>
+                <a:spcPts val="1600"/>
+              </a:lnSpc>
+              <a:buNone/>
+            </a:pPr>
+            <a:r>
+              <a:rPr lang="en-US" sz="1200" dirty="0">
+                <a:solidFill>
+                  <a:srgbClr val="3A4759"/>
+                </a:solidFill>
+                <a:latin typeface="Arial" pitchFamily="34" charset="0"/>
+                <a:ea typeface="Arial" pitchFamily="34" charset="-122"/>
+                <a:cs typeface="Arial" pitchFamily="34" charset="-120"/>
+              </a:rPr>
+              <a:t>סקירת עמיתים שיטתית על כל הערכה — בלי להמתין לזמינות של אדם</a:t>
+            </a:r>
+            <a:endParaRPr lang="en-US" sz="1200" dirty="0"/>
+          </a:p>
+        </p:txBody>
+      </p:sp>
+      <p:sp>
+        <p:nvSpPr>
+          <p:cNvPr id="8" name="Shape 6"/>
+          <p:cNvSpPr/>
+          <p:nvPr/>
+        </p:nvSpPr>
+        <p:spPr>
+          <a:xfrm>
+            <a:off x="6210148" y="2843784"/>
+            <a:ext cx="5432908" cy="960120"/>
+          </a:xfrm>
+          <a:prstGeom prst="roundRect">
+            <a:avLst>
+              <a:gd name="adj" fmla="val 6667"/>
+            </a:avLst>
+          </a:prstGeom>
+          <a:solidFill>
+            <a:srgbClr val="FFFFFF"/>
+          </a:solidFill>
+          <a:ln w="12700">
+            <a:solidFill>
+              <a:srgbClr val="DDE3EC"/>
+            </a:solidFill>
+            <a:prstDash val="solid"/>
+          </a:ln>
+        </p:spPr>
+      </p:sp>
+      <p:sp>
+        <p:nvSpPr>
+          <p:cNvPr id="9" name="Shape 7"/>
+          <p:cNvSpPr/>
+          <p:nvPr/>
+        </p:nvSpPr>
+        <p:spPr>
+          <a:xfrm>
+            <a:off x="11368735" y="3268980"/>
+            <a:ext cx="109728" cy="109728"/>
+          </a:xfrm>
+          <a:prstGeom prst="ellipse">
+            <a:avLst/>
+          </a:prstGeom>
+          <a:solidFill>
+            <a:srgbClr val="2A5298"/>
+          </a:solidFill>
+          <a:ln w="12700">
+            <a:solidFill>
+              <a:srgbClr val="2A5298"/>
+            </a:solidFill>
+            <a:prstDash val="solid"/>
+          </a:ln>
+        </p:spPr>
+      </p:sp>
+      <p:sp>
+        <p:nvSpPr>
+          <p:cNvPr id="10" name="Text 8"/>
+          <p:cNvSpPr txBox="1"/>
+          <p:nvPr/>
+        </p:nvSpPr>
+        <p:spPr>
+          <a:xfrm>
+            <a:off x="6411316" y="2898648"/>
+            <a:ext cx="4774540" cy="850392"/>
+          </a:xfrm>
+          <a:prstGeom prst="rect">
+            <a:avLst/>
+          </a:prstGeom>
+          <a:noFill/>
+          <a:ln/>
+        </p:spPr>
+        <p:txBody>
+          <a:bodyPr wrap="square" lIns="0" tIns="0" rIns="0" bIns="0" rtlCol="0" anchor="ctr"/>
+          <a:lstStyle/>
+          <a:p>
+            <a:pPr rtl="1" algn="r" indent="0" marL="0">
+              <a:lnSpc>
+                <a:spcPts val="1600"/>
+              </a:lnSpc>
+              <a:buNone/>
+            </a:pPr>
+            <a:r>
+              <a:rPr lang="en-US" sz="1200" dirty="0">
+                <a:solidFill>
+                  <a:srgbClr val="3A4759"/>
+                </a:solidFill>
+                <a:latin typeface="Arial" pitchFamily="34" charset="0"/>
+                <a:ea typeface="Arial" pitchFamily="34" charset="-122"/>
+                <a:cs typeface="Arial" pitchFamily="34" charset="-120"/>
+              </a:rPr>
+              <a:t>חשיפת ההנחות הסמויות שנושאות את ההערכה ואיש לא ניסח</a:t>
+            </a:r>
+            <a:endParaRPr lang="en-US" sz="1200" dirty="0"/>
+          </a:p>
+        </p:txBody>
+      </p:sp>
+      <p:sp>
+        <p:nvSpPr>
+          <p:cNvPr id="11" name="Shape 9"/>
+          <p:cNvSpPr/>
+          <p:nvPr/>
+        </p:nvSpPr>
+        <p:spPr>
+          <a:xfrm>
+            <a:off x="6210148" y="3950208"/>
+            <a:ext cx="5432908" cy="960120"/>
+          </a:xfrm>
+          <a:prstGeom prst="roundRect">
+            <a:avLst>
+              <a:gd name="adj" fmla="val 6667"/>
+            </a:avLst>
+          </a:prstGeom>
+          <a:solidFill>
+            <a:srgbClr val="FFFFFF"/>
+          </a:solidFill>
+          <a:ln w="12700">
+            <a:solidFill>
+              <a:srgbClr val="DDE3EC"/>
+            </a:solidFill>
+            <a:prstDash val="solid"/>
+          </a:ln>
+        </p:spPr>
+      </p:sp>
+      <p:sp>
+        <p:nvSpPr>
+          <p:cNvPr id="12" name="Shape 10"/>
+          <p:cNvSpPr/>
+          <p:nvPr/>
+        </p:nvSpPr>
+        <p:spPr>
+          <a:xfrm>
+            <a:off x="11368735" y="4375404"/>
+            <a:ext cx="109728" cy="109728"/>
+          </a:xfrm>
+          <a:prstGeom prst="ellipse">
+            <a:avLst/>
+          </a:prstGeom>
+          <a:solidFill>
+            <a:srgbClr val="2A5298"/>
+          </a:solidFill>
+          <a:ln w="12700">
+            <a:solidFill>
+              <a:srgbClr val="2A5298"/>
+            </a:solidFill>
+            <a:prstDash val="solid"/>
+          </a:ln>
+        </p:spPr>
+      </p:sp>
+      <p:sp>
+        <p:nvSpPr>
+          <p:cNvPr id="13" name="Text 11"/>
+          <p:cNvSpPr txBox="1"/>
+          <p:nvPr/>
+        </p:nvSpPr>
+        <p:spPr>
+          <a:xfrm>
+            <a:off x="6411316" y="4005072"/>
+            <a:ext cx="4774540" cy="850392"/>
+          </a:xfrm>
+          <a:prstGeom prst="rect">
+            <a:avLst/>
+          </a:prstGeom>
+          <a:noFill/>
+          <a:ln/>
+        </p:spPr>
+        <p:txBody>
+          <a:bodyPr wrap="square" lIns="0" tIns="0" rIns="0" bIns="0" rtlCol="0" anchor="ctr"/>
+          <a:lstStyle/>
+          <a:p>
+            <a:pPr rtl="1" algn="r" indent="0" marL="0">
+              <a:lnSpc>
+                <a:spcPts val="1600"/>
+              </a:lnSpc>
+              <a:buNone/>
+            </a:pPr>
+            <a:r>
+              <a:rPr lang="en-US" sz="1200" dirty="0">
+                <a:solidFill>
+                  <a:srgbClr val="3A4759"/>
+                </a:solidFill>
+                <a:latin typeface="Arial" pitchFamily="34" charset="0"/>
+                <a:ea typeface="Arial" pitchFamily="34" charset="-122"/>
+                <a:cs typeface="Arial" pitchFamily="34" charset="-120"/>
+              </a:rPr>
+              <a:t>עדויות סותרות מהשטח, בשלוש שפות, עם מקור ודירוג אמינות</a:t>
+            </a:r>
+            <a:endParaRPr lang="en-US" sz="1200" dirty="0"/>
+          </a:p>
+        </p:txBody>
+      </p:sp>
+      <p:sp>
+        <p:nvSpPr>
+          <p:cNvPr id="14" name="Shape 12"/>
+          <p:cNvSpPr/>
+          <p:nvPr/>
+        </p:nvSpPr>
+        <p:spPr>
+          <a:xfrm>
+            <a:off x="548640" y="1737360"/>
+            <a:ext cx="5432908" cy="960120"/>
+          </a:xfrm>
+          <a:prstGeom prst="roundRect">
+            <a:avLst>
+              <a:gd name="adj" fmla="val 6667"/>
+            </a:avLst>
+          </a:prstGeom>
+          <a:solidFill>
+            <a:srgbClr val="FFFFFF"/>
+          </a:solidFill>
+          <a:ln w="12700">
+            <a:solidFill>
+              <a:srgbClr val="DDE3EC"/>
+            </a:solidFill>
+            <a:prstDash val="solid"/>
+          </a:ln>
+        </p:spPr>
+      </p:sp>
+      <p:sp>
+        <p:nvSpPr>
+          <p:cNvPr id="15" name="Shape 13"/>
+          <p:cNvSpPr/>
+          <p:nvPr/>
+        </p:nvSpPr>
+        <p:spPr>
+          <a:xfrm>
+            <a:off x="5707228" y="2162556"/>
+            <a:ext cx="109728" cy="109728"/>
+          </a:xfrm>
+          <a:prstGeom prst="ellipse">
+            <a:avLst/>
+          </a:prstGeom>
+          <a:solidFill>
+            <a:srgbClr val="2A5298"/>
+          </a:solidFill>
+          <a:ln w="12700">
+            <a:solidFill>
+              <a:srgbClr val="2A5298"/>
+            </a:solidFill>
+            <a:prstDash val="solid"/>
+          </a:ln>
+        </p:spPr>
+      </p:sp>
+      <p:sp>
+        <p:nvSpPr>
+          <p:cNvPr id="16" name="Text 14"/>
+          <p:cNvSpPr txBox="1"/>
+          <p:nvPr/>
+        </p:nvSpPr>
+        <p:spPr>
+          <a:xfrm>
+            <a:off x="749808" y="1792224"/>
+            <a:ext cx="4774540" cy="850392"/>
+          </a:xfrm>
+          <a:prstGeom prst="rect">
+            <a:avLst/>
+          </a:prstGeom>
+          <a:noFill/>
+          <a:ln/>
+        </p:spPr>
+        <p:txBody>
+          <a:bodyPr wrap="square" lIns="0" tIns="0" rIns="0" bIns="0" rtlCol="0" anchor="ctr"/>
+          <a:lstStyle/>
+          <a:p>
+            <a:pPr rtl="1" algn="r" indent="0" marL="0">
+              <a:lnSpc>
+                <a:spcPts val="1600"/>
+              </a:lnSpc>
+              <a:buNone/>
+            </a:pPr>
+            <a:r>
+              <a:rPr lang="en-US" sz="1200" dirty="0">
+                <a:solidFill>
+                  <a:srgbClr val="3A4759"/>
+                </a:solidFill>
+                <a:latin typeface="Arial" pitchFamily="34" charset="0"/>
+                <a:ea typeface="Arial" pitchFamily="34" charset="-122"/>
+                <a:cs typeface="Arial" pitchFamily="34" charset="-120"/>
+              </a:rPr>
+              <a:t>חלופות מדורגות בשני ממדים במקום תרחיש יחיד</a:t>
+            </a:r>
+            <a:endParaRPr lang="en-US" sz="1200" dirty="0"/>
+          </a:p>
+        </p:txBody>
+      </p:sp>
+      <p:sp>
+        <p:nvSpPr>
+          <p:cNvPr id="17" name="Shape 15"/>
+          <p:cNvSpPr/>
+          <p:nvPr/>
+        </p:nvSpPr>
+        <p:spPr>
+          <a:xfrm>
+            <a:off x="548640" y="2843784"/>
+            <a:ext cx="5432908" cy="960120"/>
+          </a:xfrm>
+          <a:prstGeom prst="roundRect">
+            <a:avLst>
+              <a:gd name="adj" fmla="val 6667"/>
+            </a:avLst>
+          </a:prstGeom>
+          <a:solidFill>
+            <a:srgbClr val="FFFFFF"/>
+          </a:solidFill>
+          <a:ln w="12700">
+            <a:solidFill>
+              <a:srgbClr val="DDE3EC"/>
+            </a:solidFill>
+            <a:prstDash val="solid"/>
+          </a:ln>
+        </p:spPr>
+      </p:sp>
+      <p:sp>
+        <p:nvSpPr>
+          <p:cNvPr id="18" name="Shape 16"/>
+          <p:cNvSpPr/>
+          <p:nvPr/>
+        </p:nvSpPr>
+        <p:spPr>
+          <a:xfrm>
+            <a:off x="5707228" y="3268980"/>
+            <a:ext cx="109728" cy="109728"/>
+          </a:xfrm>
+          <a:prstGeom prst="ellipse">
+            <a:avLst/>
+          </a:prstGeom>
+          <a:solidFill>
+            <a:srgbClr val="2A5298"/>
+          </a:solidFill>
+          <a:ln w="12700">
+            <a:solidFill>
+              <a:srgbClr val="2A5298"/>
+            </a:solidFill>
+            <a:prstDash val="solid"/>
+          </a:ln>
+        </p:spPr>
+      </p:sp>
+      <p:sp>
+        <p:nvSpPr>
+          <p:cNvPr id="19" name="Text 17"/>
+          <p:cNvSpPr txBox="1"/>
+          <p:nvPr/>
+        </p:nvSpPr>
+        <p:spPr>
+          <a:xfrm>
+            <a:off x="749808" y="2898648"/>
+            <a:ext cx="4774540" cy="850392"/>
+          </a:xfrm>
+          <a:prstGeom prst="rect">
+            <a:avLst/>
+          </a:prstGeom>
+          <a:noFill/>
+          <a:ln/>
+        </p:spPr>
+        <p:txBody>
+          <a:bodyPr wrap="square" lIns="0" tIns="0" rIns="0" bIns="0" rtlCol="0" anchor="ctr"/>
+          <a:lstStyle/>
+          <a:p>
+            <a:pPr rtl="1" algn="r" indent="0" marL="0">
+              <a:lnSpc>
+                <a:spcPts val="1600"/>
+              </a:lnSpc>
+              <a:buNone/>
+            </a:pPr>
+            <a:r>
+              <a:rPr lang="en-US" sz="1200" dirty="0">
+                <a:solidFill>
+                  <a:srgbClr val="3A4759"/>
+                </a:solidFill>
+                <a:latin typeface="Arial" pitchFamily="34" charset="0"/>
+                <a:ea typeface="Arial" pitchFamily="34" charset="-122"/>
+                <a:cs typeface="Arial" pitchFamily="34" charset="-120"/>
+              </a:rPr>
+              <a:t>שקיפות מלאה — כל סוכן, כל חיפוש וכל עלות חשופים לבדיקה</a:t>
+            </a:r>
+            <a:endParaRPr lang="en-US" sz="1200" dirty="0"/>
+          </a:p>
+        </p:txBody>
+      </p:sp>
+      <p:sp>
+        <p:nvSpPr>
+          <p:cNvPr id="20" name="Shape 18"/>
+          <p:cNvSpPr/>
+          <p:nvPr/>
+        </p:nvSpPr>
+        <p:spPr>
+          <a:xfrm>
+            <a:off x="548640" y="3950208"/>
+            <a:ext cx="5432908" cy="960120"/>
+          </a:xfrm>
+          <a:prstGeom prst="roundRect">
+            <a:avLst>
+              <a:gd name="adj" fmla="val 6667"/>
+            </a:avLst>
+          </a:prstGeom>
+          <a:solidFill>
+            <a:srgbClr val="FFFFFF"/>
+          </a:solidFill>
+          <a:ln w="12700">
+            <a:solidFill>
+              <a:srgbClr val="DDE3EC"/>
+            </a:solidFill>
+            <a:prstDash val="solid"/>
+          </a:ln>
+        </p:spPr>
+      </p:sp>
+      <p:sp>
+        <p:nvSpPr>
+          <p:cNvPr id="21" name="Shape 19"/>
+          <p:cNvSpPr/>
+          <p:nvPr/>
+        </p:nvSpPr>
+        <p:spPr>
+          <a:xfrm>
+            <a:off x="5707228" y="4375404"/>
+            <a:ext cx="109728" cy="109728"/>
+          </a:xfrm>
+          <a:prstGeom prst="ellipse">
+            <a:avLst/>
+          </a:prstGeom>
+          <a:solidFill>
+            <a:srgbClr val="2A5298"/>
+          </a:solidFill>
+          <a:ln w="12700">
+            <a:solidFill>
+              <a:srgbClr val="2A5298"/>
+            </a:solidFill>
+            <a:prstDash val="solid"/>
+          </a:ln>
+        </p:spPr>
+      </p:sp>
+      <p:sp>
+        <p:nvSpPr>
+          <p:cNvPr id="22" name="Text 20"/>
+          <p:cNvSpPr txBox="1"/>
+          <p:nvPr/>
+        </p:nvSpPr>
+        <p:spPr>
+          <a:xfrm>
+            <a:off x="749808" y="4005072"/>
+            <a:ext cx="4774540" cy="850392"/>
+          </a:xfrm>
+          <a:prstGeom prst="rect">
+            <a:avLst/>
+          </a:prstGeom>
+          <a:noFill/>
+          <a:ln/>
+        </p:spPr>
+        <p:txBody>
+          <a:bodyPr wrap="square" lIns="0" tIns="0" rIns="0" bIns="0" rtlCol="0" anchor="ctr"/>
+          <a:lstStyle/>
+          <a:p>
+            <a:pPr rtl="1" algn="r" indent="0" marL="0">
+              <a:lnSpc>
+                <a:spcPts val="1600"/>
+              </a:lnSpc>
+              <a:buNone/>
+            </a:pPr>
+            <a:r>
+              <a:rPr lang="en-US" sz="1200" dirty="0">
+                <a:solidFill>
+                  <a:srgbClr val="3A4759"/>
+                </a:solidFill>
+                <a:latin typeface="Arial" pitchFamily="34" charset="0"/>
+                <a:ea typeface="Arial" pitchFamily="34" charset="-122"/>
+                <a:cs typeface="Arial" pitchFamily="34" charset="-120"/>
+              </a:rPr>
+              <a:t>מנוע פתוח להרחבה: הצוות מגדיל את הידע של המערכת בעצמו, בלי מפתח</a:t>
+            </a:r>
+            <a:endParaRPr lang="en-US" sz="1200" dirty="0"/>
+          </a:p>
+        </p:txBody>
+      </p:sp>
+      <p:sp>
+        <p:nvSpPr>
+          <p:cNvPr id="23" name="Shape 21"/>
+          <p:cNvSpPr/>
+          <p:nvPr/>
+        </p:nvSpPr>
+        <p:spPr>
+          <a:xfrm>
+            <a:off x="548640" y="5166360"/>
+            <a:ext cx="11094415" cy="544068"/>
+          </a:xfrm>
+          <a:prstGeom prst="roundRect">
+            <a:avLst>
+              <a:gd name="adj" fmla="val 11765"/>
+            </a:avLst>
+          </a:prstGeom>
+          <a:solidFill>
+            <a:srgbClr val="E9EDF5"/>
+          </a:solidFill>
+          <a:ln w="12700">
+            <a:solidFill>
+              <a:srgbClr val="E9EDF5"/>
+            </a:solidFill>
+            <a:prstDash val="solid"/>
+          </a:ln>
+        </p:spPr>
+      </p:sp>
+      <p:sp>
+        <p:nvSpPr>
+          <p:cNvPr id="24" name="Text 22"/>
+          <p:cNvSpPr txBox="1"/>
+          <p:nvPr/>
+        </p:nvSpPr>
+        <p:spPr>
+          <a:xfrm>
+            <a:off x="777240" y="5166360"/>
+            <a:ext cx="10637215" cy="544068"/>
+          </a:xfrm>
+          <a:prstGeom prst="rect">
+            <a:avLst/>
+          </a:prstGeom>
+          <a:noFill/>
+          <a:ln/>
+        </p:spPr>
+        <p:txBody>
+          <a:bodyPr wrap="square" lIns="0" tIns="0" rIns="0" bIns="0" rtlCol="0" anchor="ctr"/>
+          <a:lstStyle/>
+          <a:p>
+            <a:pPr rtl="1" algn="r" indent="0" marL="0">
+              <a:lnSpc>
+                <a:spcPts val="1700"/>
+              </a:lnSpc>
+              <a:buNone/>
+            </a:pPr>
+            <a:r>
+              <a:rPr lang="en-US" sz="1200" b="1" dirty="0">
+                <a:solidFill>
+                  <a:srgbClr val="0F2447"/>
+                </a:solidFill>
+                <a:latin typeface="Arial" pitchFamily="34" charset="0"/>
+                <a:ea typeface="Arial" pitchFamily="34" charset="-122"/>
+                <a:cs typeface="Arial" pitchFamily="34" charset="-120"/>
+              </a:rPr>
+              <a:t>AVAR אינה מחליפה את האנליסט. היא מוודאת שאף הערכה לא תצא מהדלת בלי שמישהו — או משהו — ניסה להפריך אותה קודם.</a:t>
+            </a:r>
+            <a:endParaRPr lang="en-US" sz="1200" dirty="0"/>
+          </a:p>
+        </p:txBody>
+      </p:sp>
+    </p:spTree>
+  </p:cSld>
+  <p:clrMapOvr>
+    <a:masterClrMapping/>
+  </p:clrMapOvr>
+</p:sld>
+</file>
+
+<file path=ppt/slides/slide36.xml><?xml version="1.0" encoding="utf-8"?>
+<p:sld xmlns:a="http://schemas.openxmlformats.org/drawingml/2006/main" xmlns:r="http://schemas.openxmlformats.org/officeDocument/2006/relationships" xmlns:p="http://schemas.openxmlformats.org/presentationml/2006/main">
+  <p:cSld name="Slide 36">
     <p:bg>
       <p:bgPr>
         <a:solidFill>
@@ -14752,7 +15443,7 @@
                 <a:ea typeface="Arial" pitchFamily="34" charset="-122"/>
                 <a:cs typeface="Arial" pitchFamily="34" charset="-120"/>
               </a:rPr>
-              <a:t>כל הנתונים, המסמכים והמקורות המופיעים בצילומי המסך הם נתוני הדגמה סינתטיים שנוצרו לצורך המדריך בלבד.</a:t>
+              <a:t>כל צילומי המסך במדריך נלקחו משלוש הרצות אמיתיות של המערכת. מסלול ההדגמה המרכזי הוא משחק מלחמה עסקי רב־שנתי (11.8.2026) — 19 קריאות מודל, 34 חיפושי רשת, 9 טענות מרכזיות ו-9 הנחות.</a:t>
             </a:r>
             <a:endParaRPr lang="en-US" sz="1100" dirty="0"/>
           </a:p>
@@ -15374,11 +16065,11 @@
         <p:spPr>
           <a:xfrm>
             <a:off x="548640" y="5166360"/>
-            <a:ext cx="11094415" cy="1097280"/>
+            <a:ext cx="11094415" cy="758952"/>
           </a:xfrm>
           <a:prstGeom prst="roundRect">
             <a:avLst>
-              <a:gd name="adj" fmla="val 5833"/>
+              <a:gd name="adj" fmla="val 8434"/>
             </a:avLst>
           </a:prstGeom>
           <a:solidFill>
@@ -15401,7 +16092,7 @@
         <p:spPr>
           <a:xfrm>
             <a:off x="777240" y="5166360"/>
-            <a:ext cx="10637215" cy="1097280"/>
+            <a:ext cx="10637215" cy="758952"/>
           </a:xfrm>
           <a:prstGeom prst="rect">
             <a:avLst/>
@@ -17129,7 +17820,7 @@
                 <a:ea typeface="Arial" pitchFamily="34" charset="-122"/>
                 <a:cs typeface="Arial" pitchFamily="34" charset="-120"/>
               </a:rPr>
-              <a:t>כל שורה מציגה טלמטריה אמיתית: מספר מילים, כמות סוכנים, קריאות LLM, טוקנים וחיפושי רשת</a:t>
+              <a:t>שלוש ההערכות שבתמונה הן ריצות אמיתיות: משחק מלחמה עסקי, בחינת מעמדה של קטר, ותמונת מצב אזורית</a:t>
             </a:r>
             <a:endParaRPr lang="en-US" sz="1200" dirty="0"/>
           </a:p>
@@ -17153,7 +17844,7 @@
                 <a:ea typeface="Arial" pitchFamily="34" charset="-122"/>
                 <a:cs typeface="Arial" pitchFamily="34" charset="-120"/>
               </a:rPr>
-              <a:t>הערכה שהסתיימה נפתחת ישירות לדו"ח; הערכה שרצה נפתחת למסך העיבוד החי</a:t>
+              <a:t>כל שורה מציגה את מחיר התהליך בפועל — 544K, 691K ו-1.19M טוקנים; 34, 49 ו-66 חיפושי רשת</a:t>
             </a:r>
             <a:endParaRPr lang="en-US" sz="1200" dirty="0"/>
           </a:p>
@@ -17177,7 +17868,7 @@
                 <a:ea typeface="Arial" pitchFamily="34" charset="-122"/>
                 <a:cs typeface="Arial" pitchFamily="34" charset="-120"/>
               </a:rPr>
-              <a:t>שקיפות עלות מלאה — המשתמש רואה כמה "עלה" כל ניתוח</a:t>
+              <a:t>הערכה שהסתיימה נפתחת ישירות לדו"ח; הערכה שרצה נפתחת למסך העיבוד החי</a:t>
             </a:r>
             <a:endParaRPr lang="en-US" sz="1200" dirty="0"/>
           </a:p>
@@ -17247,7 +17938,7 @@
                 <a:ea typeface="Arial" pitchFamily="34" charset="-122"/>
                 <a:cs typeface="Arial" pitchFamily="34" charset="-120"/>
               </a:rPr>
-              <a:t>לוח הבקרה — היסטוריית הערכות עם טלמטריה</a:t>
+              <a:t>לוח הבקרה — שלוש הערכות אמיתיות עם הטלמטריה שלהן</a:t>
             </a:r>
             <a:endParaRPr lang="en-US" sz="1000" dirty="0"/>
           </a:p>
@@ -17454,7 +18145,7 @@
                 <a:ea typeface="Arial" pitchFamily="34" charset="-122"/>
                 <a:cs typeface="Arial" pitchFamily="34" charset="-120"/>
               </a:rPr>
-              <a:t>Workflow: תצורת ניתוח שמורה שנבחרת אוטומטית לפי מילות מפתח במסמך — כאן המערכת זיהתה "הפסקת אש" והציעה את התצורה המתאימה</a:t>
+              <a:t>בתמונה: הבריף האמיתי של משחק המלחמה העסקי — ארבע שאלות מפתח לחמש שנים קדימה</a:t>
             </a:r>
             <a:endParaRPr lang="en-US" sz="1200" dirty="0"/>
           </a:p>
@@ -17478,7 +18169,7 @@
                 <a:ea typeface="Arial" pitchFamily="34" charset="-122"/>
                 <a:cs typeface="Arial" pitchFamily="34" charset="-120"/>
               </a:rPr>
-              <a:t>בחירת מודל שפה: Claude Sonnet למהירות ודיוק, או מודל הסקה לחשיבה מעמיקה</a:t>
+              <a:t>Workflow: תצורת ניתוח שמורה. הבריף הזה לא הכיל מילות הפעלה של אף תצורה, ולכן לא נבחרה אחת</a:t>
             </a:r>
             <a:endParaRPr lang="en-US" sz="1200" dirty="0"/>
           </a:p>
@@ -17502,7 +18193,7 @@
                 <a:ea typeface="Arial" pitchFamily="34" charset="-122"/>
                 <a:cs typeface="Arial" pitchFamily="34" charset="-120"/>
               </a:rPr>
-              <a:t>בחירת סוכנים ידנית — או השארה ריקה, ואז המערכת בוחרת לבד לפי תוכן המסמך</a:t>
+              <a:t>בחירת סוכנים הושארה ריקה — והמערכת בחרה בעצמה שלושה סוכנים לפי תוכן המסמך</a:t>
             </a:r>
             <a:endParaRPr lang="en-US" sz="1200" dirty="0"/>
           </a:p>
@@ -17524,8 +18215,8 @@
         </p:blipFill>
         <p:spPr>
           <a:xfrm>
-            <a:off x="1839980" y="1737360"/>
-            <a:ext cx="4168336" cy="4160520"/>
+            <a:off x="1765642" y="1737360"/>
+            <a:ext cx="4317012" cy="4160520"/>
           </a:xfrm>
           <a:prstGeom prst="rect">
             <a:avLst/>
@@ -17572,7 +18263,7 @@
                 <a:ea typeface="Arial" pitchFamily="34" charset="-122"/>
                 <a:cs typeface="Arial" pitchFamily="34" charset="-120"/>
               </a:rPr>
-              <a:t>מסך הערכה חדשה — קליטה, Workflow, מודל ובחירת סוכנים</a:t>
+              <a:t>מסך הערכה חדשה — הבריף האמיתי של משחק המלחמה</a:t>
             </a:r>
             <a:endParaRPr lang="en-US" sz="1000" dirty="0"/>
           </a:p>
@@ -17779,7 +18470,7 @@
                 <a:ea typeface="Arial" pitchFamily="34" charset="-122"/>
                 <a:cs typeface="Arial" pitchFamily="34" charset="-120"/>
               </a:rPr>
-              <a:t>לכל סוכן אפשר להגדיר מודל משלו: סוכן אחד יכול לרוץ על מודל הסקה כבד והשאר על מודל מהיר</a:t>
+              <a:t>בהרצה שבמדריך נעשה שימוש ב-Claude Sonnet; ניתן לבחור מודל הסקה לחשיבה מעמיקה יותר</a:t>
             </a:r>
             <a:endParaRPr lang="en-US" sz="1200" dirty="0"/>
           </a:p>
@@ -17803,7 +18494,7 @@
                 <a:ea typeface="Arial" pitchFamily="34" charset="-122"/>
                 <a:cs typeface="Arial" pitchFamily="34" charset="-120"/>
               </a:rPr>
-              <a:t>רשימת הסוכנים נטענת מקובצי ההגדרה — כל סוכן שנוסף מופיע כאן מיד</a:t>
+              <a:t>לכל סוכן אפשר להגדיר מודל משלו — סוכן אחד על מודל כבד והשאר על מודל מהיר</a:t>
             </a:r>
             <a:endParaRPr lang="en-US" sz="1200" dirty="0"/>
           </a:p>
@@ -17827,7 +18518,7 @@
                 <a:ea typeface="Arial" pitchFamily="34" charset="-122"/>
                 <a:cs typeface="Arial" pitchFamily="34" charset="-120"/>
               </a:rPr>
-              <a:t>השארת הבחירה ריקה מפעילה בחירה אוטומטית, ותמיד מצורף אליה Devil's Advocate</a:t>
+              <a:t>השארת בחירת הסוכנים ריקה מפעילה בחירה אוטומטית, ותמיד מצורף אליה Devil's Advocate</a:t>
             </a:r>
             <a:endParaRPr lang="en-US" sz="1200" dirty="0"/>
           </a:p>
